--- a/other/Cube cascade.pptx
+++ b/other/Cube cascade.pptx
@@ -5,10 +5,10 @@
     <p:sldMasterId id="2147483648" r:id="rId4"/>
   </p:sldMasterIdLst>
   <p:notesMasterIdLst>
-    <p:notesMasterId r:id="rId18"/>
+    <p:notesMasterId r:id="rId17"/>
   </p:notesMasterIdLst>
   <p:handoutMasterIdLst>
-    <p:handoutMasterId r:id="rId19"/>
+    <p:handoutMasterId r:id="rId18"/>
   </p:handoutMasterIdLst>
   <p:sldIdLst>
     <p:sldId id="256" r:id="rId5"/>
@@ -18,12 +18,11 @@
     <p:sldId id="301" r:id="rId9"/>
     <p:sldId id="305" r:id="rId10"/>
     <p:sldId id="312" r:id="rId11"/>
-    <p:sldId id="310" r:id="rId12"/>
-    <p:sldId id="306" r:id="rId13"/>
-    <p:sldId id="309" r:id="rId14"/>
-    <p:sldId id="304" r:id="rId15"/>
-    <p:sldId id="308" r:id="rId16"/>
-    <p:sldId id="281" r:id="rId17"/>
+    <p:sldId id="306" r:id="rId12"/>
+    <p:sldId id="309" r:id="rId13"/>
+    <p:sldId id="304" r:id="rId14"/>
+    <p:sldId id="308" r:id="rId15"/>
+    <p:sldId id="281" r:id="rId16"/>
   </p:sldIdLst>
   <p:sldSz cx="12192000" cy="6858000"/>
   <p:notesSz cx="6858000" cy="9144000"/>
@@ -1195,6 +1194,84 @@
       </cdr:spPr>
     </cdr:pic>
   </cdr:relSizeAnchor>
+  <cdr:relSizeAnchor xmlns:cdr="http://schemas.openxmlformats.org/drawingml/2006/chartDrawing">
+    <cdr:from>
+      <cdr:x>0</cdr:x>
+      <cdr:y>0</cdr:y>
+    </cdr:from>
+    <cdr:to>
+      <cdr:x>1</cdr:x>
+      <cdr:y>1</cdr:y>
+    </cdr:to>
+    <cdr:pic>
+      <cdr:nvPicPr>
+        <cdr:cNvPr id="3" name="chart">
+          <a:extLst xmlns:a="http://schemas.openxmlformats.org/drawingml/2006/main">
+            <a:ext uri="{FF2B5EF4-FFF2-40B4-BE49-F238E27FC236}">
+              <a16:creationId xmlns:a16="http://schemas.microsoft.com/office/drawing/2014/main" id="{EC572ADC-9105-9FA9-0702-66A7CFFA3216}"/>
+            </a:ext>
+          </a:extLst>
+        </cdr:cNvPr>
+        <cdr:cNvPicPr>
+          <a:picLocks xmlns:a="http://schemas.openxmlformats.org/drawingml/2006/main" noChangeAspect="1"/>
+        </cdr:cNvPicPr>
+      </cdr:nvPicPr>
+      <cdr:blipFill>
+        <a:blip xmlns:a="http://schemas.openxmlformats.org/drawingml/2006/main" xmlns:r="http://schemas.openxmlformats.org/officeDocument/2006/relationships" r:embed="rId2"/>
+        <a:stretch xmlns:a="http://schemas.openxmlformats.org/drawingml/2006/main">
+          <a:fillRect/>
+        </a:stretch>
+      </cdr:blipFill>
+      <cdr:spPr>
+        <a:xfrm xmlns:a="http://schemas.openxmlformats.org/drawingml/2006/main">
+          <a:off x="0" y="0"/>
+          <a:ext cx="7554379" cy="5982535"/>
+        </a:xfrm>
+        <a:prstGeom xmlns:a="http://schemas.openxmlformats.org/drawingml/2006/main" prst="rect">
+          <a:avLst/>
+        </a:prstGeom>
+      </cdr:spPr>
+    </cdr:pic>
+  </cdr:relSizeAnchor>
+  <cdr:relSizeAnchor xmlns:cdr="http://schemas.openxmlformats.org/drawingml/2006/chartDrawing">
+    <cdr:from>
+      <cdr:x>0</cdr:x>
+      <cdr:y>0</cdr:y>
+    </cdr:from>
+    <cdr:to>
+      <cdr:x>1</cdr:x>
+      <cdr:y>1</cdr:y>
+    </cdr:to>
+    <cdr:pic>
+      <cdr:nvPicPr>
+        <cdr:cNvPr id="4" name="chart">
+          <a:extLst xmlns:a="http://schemas.openxmlformats.org/drawingml/2006/main">
+            <a:ext uri="{FF2B5EF4-FFF2-40B4-BE49-F238E27FC236}">
+              <a16:creationId xmlns:a16="http://schemas.microsoft.com/office/drawing/2014/main" id="{EDE7788B-6467-6600-E5CF-71A83731F194}"/>
+            </a:ext>
+          </a:extLst>
+        </cdr:cNvPr>
+        <cdr:cNvPicPr>
+          <a:picLocks xmlns:a="http://schemas.openxmlformats.org/drawingml/2006/main" noChangeAspect="1"/>
+        </cdr:cNvPicPr>
+      </cdr:nvPicPr>
+      <cdr:blipFill>
+        <a:blip xmlns:a="http://schemas.openxmlformats.org/drawingml/2006/main" xmlns:r="http://schemas.openxmlformats.org/officeDocument/2006/relationships" r:embed="rId3"/>
+        <a:stretch xmlns:a="http://schemas.openxmlformats.org/drawingml/2006/main">
+          <a:fillRect/>
+        </a:stretch>
+      </cdr:blipFill>
+      <cdr:spPr>
+        <a:xfrm xmlns:a="http://schemas.openxmlformats.org/drawingml/2006/main">
+          <a:off x="0" y="0"/>
+          <a:ext cx="4519735" cy="3145903"/>
+        </a:xfrm>
+        <a:prstGeom xmlns:a="http://schemas.openxmlformats.org/drawingml/2006/main" prst="rect">
+          <a:avLst/>
+        </a:prstGeom>
+      </cdr:spPr>
+    </cdr:pic>
+  </cdr:relSizeAnchor>
 </c:userShapes>
 </file>
 
@@ -1294,7 +1371,7 @@
             <a:pPr rtl="0"/>
             <a:fld id="{653DF011-7E5D-410B-B704-516B718BB50A}" type="datetime1">
               <a:rPr lang="ru-RU" smtClean="0"/>
-              <a:t>23.01.2025</a:t>
+              <a:t>04.02.2025</a:t>
             </a:fld>
             <a:endParaRPr lang="ru-RU" dirty="0"/>
           </a:p>
@@ -1476,7 +1553,7 @@
             <a:fld id="{D4D2DA09-4E9C-44B8-BC33-6EB8C02EED6A}" type="datetime1">
               <a:rPr lang="ru-RU" smtClean="0"/>
               <a:pPr/>
-              <a:t>23.01.2025</a:t>
+              <a:t>04.02.2025</a:t>
             </a:fld>
             <a:endParaRPr lang="ru-RU" dirty="0"/>
           </a:p>
@@ -1933,7 +2010,7 @@
     </p:spTree>
     <p:extLst>
       <p:ext uri="{BB962C8B-B14F-4D97-AF65-F5344CB8AC3E}">
-        <p14:creationId xmlns:p14="http://schemas.microsoft.com/office/powerpoint/2010/main" val="535974073"/>
+        <p14:creationId xmlns:p14="http://schemas.microsoft.com/office/powerpoint/2010/main" val="274537352"/>
       </p:ext>
     </p:extLst>
   </p:cSld>
@@ -2019,100 +2096,6 @@
             <a:fld id="{821E5FCA-B2DD-C941-A2C1-638939433487}" type="slidenum">
               <a:rPr lang="ru-RU" smtClean="0"/>
               <a:t>12</a:t>
-            </a:fld>
-            <a:endParaRPr lang="ru-RU"/>
-          </a:p>
-        </p:txBody>
-      </p:sp>
-    </p:spTree>
-    <p:extLst>
-      <p:ext uri="{BB962C8B-B14F-4D97-AF65-F5344CB8AC3E}">
-        <p14:creationId xmlns:p14="http://schemas.microsoft.com/office/powerpoint/2010/main" val="274537352"/>
-      </p:ext>
-    </p:extLst>
-  </p:cSld>
-  <p:clrMapOvr>
-    <a:masterClrMapping/>
-  </p:clrMapOvr>
-</p:notes>
-</file>
-
-<file path=ppt/notesSlides/notesSlide12.xml><?xml version="1.0" encoding="utf-8"?>
-<p:notes xmlns:a="http://schemas.openxmlformats.org/drawingml/2006/main" xmlns:r="http://schemas.openxmlformats.org/officeDocument/2006/relationships" xmlns:p="http://schemas.openxmlformats.org/presentationml/2006/main">
-  <p:cSld>
-    <p:spTree>
-      <p:nvGrpSpPr>
-        <p:cNvPr id="1" name=""/>
-        <p:cNvGrpSpPr/>
-        <p:nvPr/>
-      </p:nvGrpSpPr>
-      <p:grpSpPr>
-        <a:xfrm>
-          <a:off x="0" y="0"/>
-          <a:ext cx="0" cy="0"/>
-          <a:chOff x="0" y="0"/>
-          <a:chExt cx="0" cy="0"/>
-        </a:xfrm>
-      </p:grpSpPr>
-      <p:sp>
-        <p:nvSpPr>
-          <p:cNvPr id="2" name="Образ слайда 1"/>
-          <p:cNvSpPr>
-            <a:spLocks noGrp="1" noRot="1" noChangeAspect="1"/>
-          </p:cNvSpPr>
-          <p:nvPr>
-            <p:ph type="sldImg"/>
-          </p:nvPr>
-        </p:nvSpPr>
-        <p:spPr/>
-      </p:sp>
-      <p:sp>
-        <p:nvSpPr>
-          <p:cNvPr id="3" name="Заметки 2"/>
-          <p:cNvSpPr>
-            <a:spLocks noGrp="1"/>
-          </p:cNvSpPr>
-          <p:nvPr>
-            <p:ph type="body" idx="1"/>
-          </p:nvPr>
-        </p:nvSpPr>
-        <p:spPr/>
-        <p:txBody>
-          <a:bodyPr rtlCol="0"/>
-          <a:lstStyle>
-            <a:defPPr>
-              <a:defRPr lang="ru-MO"/>
-            </a:defPPr>
-          </a:lstStyle>
-          <a:p>
-            <a:pPr rtl="0"/>
-            <a:endParaRPr lang="ru-RU"/>
-          </a:p>
-        </p:txBody>
-      </p:sp>
-      <p:sp>
-        <p:nvSpPr>
-          <p:cNvPr id="4" name="Номер слайда 3"/>
-          <p:cNvSpPr>
-            <a:spLocks noGrp="1"/>
-          </p:cNvSpPr>
-          <p:nvPr>
-            <p:ph type="sldNum" sz="quarter" idx="5"/>
-          </p:nvPr>
-        </p:nvSpPr>
-        <p:spPr/>
-        <p:txBody>
-          <a:bodyPr rtlCol="0"/>
-          <a:lstStyle>
-            <a:defPPr>
-              <a:defRPr lang="ru-MO"/>
-            </a:defPPr>
-          </a:lstStyle>
-          <a:p>
-            <a:pPr rtl="0"/>
-            <a:fld id="{821E5FCA-B2DD-C941-A2C1-638939433487}" type="slidenum">
-              <a:rPr lang="ru-RU" smtClean="0"/>
-              <a:t>13</a:t>
             </a:fld>
             <a:endParaRPr lang="ru-RU"/>
           </a:p>
@@ -2685,7 +2668,7 @@
     </p:spTree>
     <p:extLst>
       <p:ext uri="{BB962C8B-B14F-4D97-AF65-F5344CB8AC3E}">
-        <p14:creationId xmlns:p14="http://schemas.microsoft.com/office/powerpoint/2010/main" val="1851414635"/>
+        <p14:creationId xmlns:p14="http://schemas.microsoft.com/office/powerpoint/2010/main" val="4068106215"/>
       </p:ext>
     </p:extLst>
   </p:cSld>
@@ -2779,7 +2762,7 @@
     </p:spTree>
     <p:extLst>
       <p:ext uri="{BB962C8B-B14F-4D97-AF65-F5344CB8AC3E}">
-        <p14:creationId xmlns:p14="http://schemas.microsoft.com/office/powerpoint/2010/main" val="4068106215"/>
+        <p14:creationId xmlns:p14="http://schemas.microsoft.com/office/powerpoint/2010/main" val="2660731688"/>
       </p:ext>
     </p:extLst>
   </p:cSld>
@@ -2873,7 +2856,7 @@
     </p:spTree>
     <p:extLst>
       <p:ext uri="{BB962C8B-B14F-4D97-AF65-F5344CB8AC3E}">
-        <p14:creationId xmlns:p14="http://schemas.microsoft.com/office/powerpoint/2010/main" val="2660731688"/>
+        <p14:creationId xmlns:p14="http://schemas.microsoft.com/office/powerpoint/2010/main" val="535974073"/>
       </p:ext>
     </p:extLst>
   </p:cSld>
@@ -13188,14 +13171,117 @@
             <a:r>
               <a:rPr lang="en-US" sz="8800" dirty="0">
                 <a:solidFill>
+                  <a:srgbClr val="FF0000"/>
+                </a:solidFill>
+              </a:rPr>
+              <a:t>C</a:t>
+            </a:r>
+            <a:r>
+              <a:rPr lang="en-US" sz="8800" dirty="0">
+                <a:solidFill>
+                  <a:schemeClr val="accent1">
+                    <a:lumMod val="50000"/>
+                  </a:schemeClr>
+                </a:solidFill>
+              </a:rPr>
+              <a:t>u</a:t>
+            </a:r>
+            <a:r>
+              <a:rPr lang="en-US" sz="8800" dirty="0">
+                <a:solidFill>
+                  <a:schemeClr val="accent2">
+                    <a:lumMod val="25000"/>
+                  </a:schemeClr>
+                </a:solidFill>
+              </a:rPr>
+              <a:t>b</a:t>
+            </a:r>
+            <a:r>
+              <a:rPr lang="en-US" sz="8800" dirty="0">
+                <a:solidFill>
+                  <a:srgbClr val="00B050"/>
+                </a:solidFill>
+              </a:rPr>
+              <a:t>e</a:t>
+            </a:r>
+            <a:r>
+              <a:rPr lang="en-US" sz="8800" dirty="0">
+                <a:solidFill>
                   <a:schemeClr val="bg1">
                     <a:lumMod val="85000"/>
                   </a:schemeClr>
                 </a:solidFill>
               </a:rPr>
-              <a:t>Cube cascade</a:t>
-            </a:r>
-            <a:endParaRPr lang="ru-RU" sz="3200" dirty="0"/>
+              <a:t> </a:t>
+            </a:r>
+            <a:r>
+              <a:rPr lang="en-US" sz="8800" dirty="0">
+                <a:solidFill>
+                  <a:srgbClr val="FFC000"/>
+                </a:solidFill>
+              </a:rPr>
+              <a:t>c</a:t>
+            </a:r>
+            <a:r>
+              <a:rPr lang="en-US" sz="8800" dirty="0">
+                <a:solidFill>
+                  <a:srgbClr val="00B0F0"/>
+                </a:solidFill>
+              </a:rPr>
+              <a:t>a</a:t>
+            </a:r>
+            <a:r>
+              <a:rPr lang="en-US" sz="8800" dirty="0">
+                <a:solidFill>
+                  <a:schemeClr val="accent6">
+                    <a:lumMod val="60000"/>
+                    <a:lumOff val="40000"/>
+                  </a:schemeClr>
+                </a:solidFill>
+              </a:rPr>
+              <a:t>s</a:t>
+            </a:r>
+            <a:r>
+              <a:rPr lang="en-US" sz="8800" dirty="0">
+                <a:solidFill>
+                  <a:srgbClr val="C00000"/>
+                </a:solidFill>
+              </a:rPr>
+              <a:t>c</a:t>
+            </a:r>
+            <a:r>
+              <a:rPr lang="en-US" sz="8800" dirty="0">
+                <a:solidFill>
+                  <a:srgbClr val="0070C0"/>
+                </a:solidFill>
+              </a:rPr>
+              <a:t>a</a:t>
+            </a:r>
+            <a:r>
+              <a:rPr lang="en-US" sz="8800" dirty="0">
+                <a:solidFill>
+                  <a:srgbClr val="92D050"/>
+                </a:solidFill>
+              </a:rPr>
+              <a:t>d</a:t>
+            </a:r>
+            <a:r>
+              <a:rPr lang="en-US" sz="8800" dirty="0">
+                <a:solidFill>
+                  <a:schemeClr val="accent1">
+                    <a:lumMod val="90000"/>
+                  </a:schemeClr>
+                </a:solidFill>
+              </a:rPr>
+              <a:t>e</a:t>
+            </a:r>
+            <a:endParaRPr lang="ru-RU" sz="3200" dirty="0">
+              <a:solidFill>
+                <a:schemeClr val="accent1">
+                  <a:lumMod val="90000"/>
+                </a:schemeClr>
+              </a:solidFill>
+            </a:endParaRPr>
           </a:p>
         </p:txBody>
       </p:sp>
@@ -13288,7 +13374,7 @@
         </p:nvSpPr>
         <p:spPr>
           <a:xfrm>
-            <a:off x="8736830" y="5933296"/>
+            <a:off x="8744688" y="5753671"/>
             <a:ext cx="3447312" cy="1280160"/>
           </a:xfrm>
           <a:prstGeom prst="rect">
@@ -13468,32 +13554,68 @@
           </a:lstStyle>
           <a:p>
             <a:r>
-              <a:rPr lang="ru-RU" sz="2000" cap="all" spc="300" dirty="0">
+              <a:rPr lang="ru-RU" sz="2000" b="0" cap="all" spc="300" dirty="0">
                 <a:ln w="28575">
                   <a:solidFill>
                     <a:schemeClr val="tx1"/>
                   </a:solidFill>
                 </a:ln>
                 <a:noFill/>
-                <a:latin typeface="Bahnschrift SemiBold SemiConden" panose="020B0502040204020203" pitchFamily="34" charset="0"/>
+                <a:latin typeface="Arial Narrow" panose="020B0606020202030204" pitchFamily="34" charset="0"/>
                 <a:ea typeface="+mj-ea"/>
               </a:rPr>
               <a:t>Бахара</a:t>
             </a:r>
-          </a:p>
-          <a:p>
-            <a:r>
-              <a:rPr lang="ru-RU" sz="2000" cap="all" spc="300" dirty="0">
+            <a:r>
+              <a:rPr lang="en-US" sz="2000" b="0" cap="all" spc="300" dirty="0">
                 <a:ln w="28575">
                   <a:solidFill>
                     <a:schemeClr val="tx1"/>
                   </a:solidFill>
                 </a:ln>
                 <a:noFill/>
-                <a:latin typeface="Bahnschrift SemiBold SemiConden" panose="020B0502040204020203" pitchFamily="34" charset="0"/>
+                <a:latin typeface="Arial Narrow" panose="020B0606020202030204" pitchFamily="34" charset="0"/>
                 <a:ea typeface="+mj-ea"/>
               </a:rPr>
-              <a:t>Аркадий</a:t>
+              <a:t> </a:t>
+            </a:r>
+            <a:r>
+              <a:rPr lang="ru-RU" sz="2000" b="0" cap="all" spc="300" dirty="0" err="1">
+                <a:ln w="28575">
+                  <a:solidFill>
+                    <a:schemeClr val="tx1"/>
+                  </a:solidFill>
+                </a:ln>
+                <a:noFill/>
+                <a:latin typeface="Arial Narrow" panose="020B0606020202030204" pitchFamily="34" charset="0"/>
+                <a:ea typeface="+mj-ea"/>
+              </a:rPr>
+              <a:t>курбанова</a:t>
+            </a:r>
+            <a:endParaRPr lang="ru-RU" sz="2000" b="0" cap="all" spc="300" dirty="0">
+              <a:ln w="28575">
+                <a:solidFill>
+                  <a:schemeClr val="tx1"/>
+                </a:solidFill>
+              </a:ln>
+              <a:noFill/>
+              <a:latin typeface="Arial Narrow" panose="020B0606020202030204" pitchFamily="34" charset="0"/>
+              <a:ea typeface="+mj-ea"/>
+            </a:endParaRPr>
+          </a:p>
+          <a:p>
+            <a:r>
+              <a:rPr lang="ru-RU" sz="2000" b="0" cap="all" spc="300" dirty="0">
+                <a:ln w="28575">
+                  <a:solidFill>
+                    <a:schemeClr val="tx1"/>
+                  </a:solidFill>
+                </a:ln>
+                <a:noFill/>
+                <a:latin typeface="Arial Narrow" panose="020B0606020202030204" pitchFamily="34" charset="0"/>
+                <a:ea typeface="+mj-ea"/>
+              </a:rPr>
+              <a:t>Аркадий Гуляков</a:t>
             </a:r>
           </a:p>
         </p:txBody>
@@ -13575,10 +13697,10 @@
       </p:grpSpPr>
       <p:sp>
         <p:nvSpPr>
-          <p:cNvPr id="2" name="Заголовок 1">
-            <a:extLst>
-              <a:ext uri="{FF2B5EF4-FFF2-40B4-BE49-F238E27FC236}">
-                <a16:creationId xmlns:a16="http://schemas.microsoft.com/office/drawing/2014/main" id="{08737D19-4D60-B5D0-74C9-46A5D81261BB}"/>
+          <p:cNvPr id="41" name="Заголовок 40">
+            <a:extLst>
+              <a:ext uri="{FF2B5EF4-FFF2-40B4-BE49-F238E27FC236}">
+                <a16:creationId xmlns:a16="http://schemas.microsoft.com/office/drawing/2014/main" id="{A49ABFAC-D966-9A7C-EFB9-4AA2A4BFCB3B}"/>
               </a:ext>
             </a:extLst>
           </p:cNvPr>
@@ -13589,12 +13711,7 @@
             <p:ph type="title"/>
           </p:nvPr>
         </p:nvSpPr>
-        <p:spPr>
-          <a:xfrm>
-            <a:off x="612648" y="725005"/>
-            <a:ext cx="10972800" cy="1572768"/>
-          </a:xfrm>
-        </p:spPr>
+        <p:spPr/>
         <p:txBody>
           <a:bodyPr rtlCol="0"/>
           <a:lstStyle>
@@ -13606,7 +13723,7 @@
             <a:pPr rtl="0"/>
             <a:r>
               <a:rPr lang="ru-RU" dirty="0"/>
-              <a:t>Визуальные и звуковые эффекты</a:t>
+              <a:t>Результаты</a:t>
             </a:r>
           </a:p>
         </p:txBody>
@@ -13616,7 +13733,7 @@
           <p:cNvPr id="7" name="Нижний колонтитул 6">
             <a:extLst>
               <a:ext uri="{FF2B5EF4-FFF2-40B4-BE49-F238E27FC236}">
-                <a16:creationId xmlns:a16="http://schemas.microsoft.com/office/drawing/2014/main" id="{C9F924E8-B6E6-C266-842D-422148E57074}"/>
+                <a16:creationId xmlns:a16="http://schemas.microsoft.com/office/drawing/2014/main" id="{6C58156F-B502-2468-F7F7-7EF56BA44FBE}"/>
               </a:ext>
             </a:extLst>
           </p:cNvPr>
@@ -13629,7 +13746,7 @@
         </p:nvSpPr>
         <p:spPr>
           <a:xfrm>
-            <a:off x="4038600" y="114393"/>
+            <a:off x="4038600" y="12153"/>
             <a:ext cx="4114800" cy="856526"/>
           </a:xfrm>
         </p:spPr>
@@ -13652,10 +13769,10 @@
       </p:sp>
       <p:sp>
         <p:nvSpPr>
-          <p:cNvPr id="3" name="Текст 2">
-            <a:extLst>
-              <a:ext uri="{FF2B5EF4-FFF2-40B4-BE49-F238E27FC236}">
-                <a16:creationId xmlns:a16="http://schemas.microsoft.com/office/drawing/2014/main" id="{9B0814BF-E9DC-8615-1CF0-1112CBD60A66}"/>
+          <p:cNvPr id="42" name="Текст 41">
+            <a:extLst>
+              <a:ext uri="{FF2B5EF4-FFF2-40B4-BE49-F238E27FC236}">
+                <a16:creationId xmlns:a16="http://schemas.microsoft.com/office/drawing/2014/main" id="{E7EE4D5B-87DD-4137-0625-40623A0E8A35}"/>
               </a:ext>
             </a:extLst>
           </p:cNvPr>
@@ -13666,7 +13783,12 @@
             <p:ph type="body" idx="1"/>
           </p:nvPr>
         </p:nvSpPr>
-        <p:spPr/>
+        <p:spPr>
+          <a:xfrm>
+            <a:off x="3791744" y="2636912"/>
+            <a:ext cx="5157787" cy="2178119"/>
+          </a:xfrm>
+        </p:spPr>
         <p:txBody>
           <a:bodyPr rtlCol="0"/>
           <a:lstStyle>
@@ -13675,311 +13797,33 @@
             </a:defPPr>
           </a:lstStyle>
           <a:p>
-            <a:pPr rtl="0"/>
-            <a:r>
-              <a:rPr lang="ru-RU" sz="1400" dirty="0"/>
-              <a:t>Динамика</a:t>
-            </a:r>
-          </a:p>
-        </p:txBody>
-      </p:sp>
-      <p:sp>
-        <p:nvSpPr>
-          <p:cNvPr id="23" name="Объект 22">
-            <a:extLst>
-              <a:ext uri="{FF2B5EF4-FFF2-40B4-BE49-F238E27FC236}">
-                <a16:creationId xmlns:a16="http://schemas.microsoft.com/office/drawing/2014/main" id="{2C051FD2-C541-D8EE-D263-DFD01AD1C602}"/>
-              </a:ext>
-            </a:extLst>
-          </p:cNvPr>
-          <p:cNvSpPr>
-            <a:spLocks noGrp="1"/>
-          </p:cNvSpPr>
-          <p:nvPr>
-            <p:ph sz="half" idx="2"/>
-          </p:nvPr>
-        </p:nvSpPr>
-        <p:spPr/>
-        <p:txBody>
-          <a:bodyPr rtlCol="0"/>
-          <a:lstStyle>
-            <a:defPPr>
-              <a:defRPr lang="ru-MO"/>
-            </a:defPPr>
-          </a:lstStyle>
-          <a:p>
-            <a:pPr rtl="0"/>
-            <a:r>
-              <a:rPr lang="ru-RU" sz="1300" dirty="0"/>
-              <a:t>Заголовок переливается цветами радуги.</a:t>
-            </a:r>
-          </a:p>
-          <a:p>
-            <a:pPr rtl="0"/>
-            <a:endParaRPr lang="ru-RU" dirty="0"/>
-          </a:p>
-        </p:txBody>
-      </p:sp>
-      <p:sp>
-        <p:nvSpPr>
-          <p:cNvPr id="5" name="Текст 4">
-            <a:extLst>
-              <a:ext uri="{FF2B5EF4-FFF2-40B4-BE49-F238E27FC236}">
-                <a16:creationId xmlns:a16="http://schemas.microsoft.com/office/drawing/2014/main" id="{4714EE7D-83C7-DE47-C100-0904BB907007}"/>
-              </a:ext>
-            </a:extLst>
-          </p:cNvPr>
-          <p:cNvSpPr>
-            <a:spLocks noGrp="1"/>
-          </p:cNvSpPr>
-          <p:nvPr>
-            <p:ph type="body" sz="quarter" idx="3"/>
-          </p:nvPr>
-        </p:nvSpPr>
-        <p:spPr/>
-        <p:txBody>
-          <a:bodyPr rtlCol="0"/>
-          <a:lstStyle>
-            <a:defPPr>
-              <a:defRPr lang="ru-MO"/>
-            </a:defPPr>
-          </a:lstStyle>
-          <a:p>
-            <a:pPr rtl="0"/>
-            <a:r>
-              <a:rPr lang="ru-RU" sz="1400" dirty="0"/>
-              <a:t>Анимация</a:t>
-            </a:r>
-          </a:p>
-        </p:txBody>
-      </p:sp>
-      <p:sp>
-        <p:nvSpPr>
-          <p:cNvPr id="24" name="Объект 23">
-            <a:extLst>
-              <a:ext uri="{FF2B5EF4-FFF2-40B4-BE49-F238E27FC236}">
-                <a16:creationId xmlns:a16="http://schemas.microsoft.com/office/drawing/2014/main" id="{61DE34F0-9D00-D163-584E-9738310DB6BC}"/>
-              </a:ext>
-            </a:extLst>
-          </p:cNvPr>
-          <p:cNvSpPr>
-            <a:spLocks noGrp="1"/>
-          </p:cNvSpPr>
-          <p:nvPr>
-            <p:ph sz="quarter" idx="4"/>
-          </p:nvPr>
-        </p:nvSpPr>
-        <p:spPr/>
-        <p:txBody>
-          <a:bodyPr rtlCol="0"/>
-          <a:lstStyle>
-            <a:defPPr>
-              <a:defRPr lang="ru-MO"/>
-            </a:defPPr>
-          </a:lstStyle>
-          <a:p>
-            <a:pPr lvl="0" rtl="0"/>
-            <a:r>
-              <a:rPr lang="ru-RU" sz="1300" dirty="0"/>
-              <a:t>Плавное увеличение кнопок при наведении.</a:t>
-            </a:r>
-          </a:p>
-        </p:txBody>
-      </p:sp>
-      <p:sp>
-        <p:nvSpPr>
-          <p:cNvPr id="9" name="Текст 8">
-            <a:extLst>
-              <a:ext uri="{FF2B5EF4-FFF2-40B4-BE49-F238E27FC236}">
-                <a16:creationId xmlns:a16="http://schemas.microsoft.com/office/drawing/2014/main" id="{310ADB9E-1121-2450-35D1-8486C9BC3613}"/>
-              </a:ext>
-            </a:extLst>
-          </p:cNvPr>
-          <p:cNvSpPr>
-            <a:spLocks noGrp="1"/>
-          </p:cNvSpPr>
-          <p:nvPr>
-            <p:ph type="body" sz="quarter" idx="13"/>
-          </p:nvPr>
-        </p:nvSpPr>
-        <p:spPr/>
-        <p:txBody>
-          <a:bodyPr rtlCol="0"/>
-          <a:lstStyle>
-            <a:defPPr>
-              <a:defRPr lang="ru-MO"/>
-            </a:defPPr>
-          </a:lstStyle>
-          <a:p>
-            <a:pPr rtl="0"/>
-            <a:r>
-              <a:rPr lang="ru-RU" sz="1400" dirty="0"/>
-              <a:t>Новый год</a:t>
-            </a:r>
-          </a:p>
-        </p:txBody>
-      </p:sp>
-      <p:sp>
-        <p:nvSpPr>
-          <p:cNvPr id="25" name="Объект 24">
-            <a:extLst>
-              <a:ext uri="{FF2B5EF4-FFF2-40B4-BE49-F238E27FC236}">
-                <a16:creationId xmlns:a16="http://schemas.microsoft.com/office/drawing/2014/main" id="{3F1B077F-4F6F-1F99-B5B6-BF27786BBA9F}"/>
-              </a:ext>
-            </a:extLst>
-          </p:cNvPr>
-          <p:cNvSpPr>
-            <a:spLocks noGrp="1"/>
-          </p:cNvSpPr>
-          <p:nvPr>
-            <p:ph sz="quarter" idx="14"/>
-          </p:nvPr>
-        </p:nvSpPr>
-        <p:spPr/>
-        <p:txBody>
-          <a:bodyPr rtlCol="0"/>
-          <a:lstStyle>
-            <a:defPPr>
-              <a:defRPr lang="ru-MO"/>
-            </a:defPPr>
-          </a:lstStyle>
-          <a:p>
-            <a:pPr lvl="0" rtl="0"/>
-            <a:r>
-              <a:rPr lang="ru-RU" sz="1300" dirty="0"/>
-              <a:t>Снежинки украшают фон игрового меню.</a:t>
-            </a:r>
-          </a:p>
-        </p:txBody>
-      </p:sp>
-      <p:sp>
-        <p:nvSpPr>
-          <p:cNvPr id="11" name="Текст 10">
-            <a:extLst>
-              <a:ext uri="{FF2B5EF4-FFF2-40B4-BE49-F238E27FC236}">
-                <a16:creationId xmlns:a16="http://schemas.microsoft.com/office/drawing/2014/main" id="{FAA4C0B8-3B41-049C-EA95-B5BC48C10C66}"/>
-              </a:ext>
-            </a:extLst>
-          </p:cNvPr>
-          <p:cNvSpPr>
-            <a:spLocks noGrp="1"/>
-          </p:cNvSpPr>
-          <p:nvPr>
-            <p:ph type="body" sz="quarter" idx="15"/>
-          </p:nvPr>
-        </p:nvSpPr>
-        <p:spPr/>
-        <p:txBody>
-          <a:bodyPr rtlCol="0"/>
-          <a:lstStyle>
-            <a:defPPr>
-              <a:defRPr lang="ru-MO"/>
-            </a:defPPr>
-          </a:lstStyle>
-          <a:p>
-            <a:pPr rtl="0"/>
-            <a:r>
-              <a:rPr lang="ru-RU" sz="1400" dirty="0"/>
-              <a:t>Цвета</a:t>
-            </a:r>
-          </a:p>
-        </p:txBody>
-      </p:sp>
-      <p:sp>
-        <p:nvSpPr>
-          <p:cNvPr id="26" name="Объект 25">
-            <a:extLst>
-              <a:ext uri="{FF2B5EF4-FFF2-40B4-BE49-F238E27FC236}">
-                <a16:creationId xmlns:a16="http://schemas.microsoft.com/office/drawing/2014/main" id="{6ACBEE98-EEED-F89F-8CC0-E8497F8E546E}"/>
-              </a:ext>
-            </a:extLst>
-          </p:cNvPr>
-          <p:cNvSpPr>
-            <a:spLocks noGrp="1"/>
-          </p:cNvSpPr>
-          <p:nvPr>
-            <p:ph sz="quarter" idx="16"/>
-          </p:nvPr>
-        </p:nvSpPr>
-        <p:spPr/>
-        <p:txBody>
-          <a:bodyPr rtlCol="0"/>
-          <a:lstStyle>
-            <a:defPPr>
-              <a:defRPr lang="ru-MO"/>
-            </a:defPPr>
-          </a:lstStyle>
-          <a:p>
-            <a:pPr lvl="0" rtl="0"/>
-            <a:r>
-              <a:rPr lang="ru-RU" sz="1300" dirty="0"/>
-              <a:t>Фигурки при генерации имеют яркие цвета.</a:t>
-            </a:r>
-          </a:p>
-        </p:txBody>
-      </p:sp>
-      <p:sp>
-        <p:nvSpPr>
-          <p:cNvPr id="13" name="Текст 12">
-            <a:extLst>
-              <a:ext uri="{FF2B5EF4-FFF2-40B4-BE49-F238E27FC236}">
-                <a16:creationId xmlns:a16="http://schemas.microsoft.com/office/drawing/2014/main" id="{8850A56B-786B-E4E2-77AC-8193D264E2FE}"/>
-              </a:ext>
-            </a:extLst>
-          </p:cNvPr>
-          <p:cNvSpPr>
-            <a:spLocks noGrp="1"/>
-          </p:cNvSpPr>
-          <p:nvPr>
-            <p:ph type="body" sz="quarter" idx="17"/>
-          </p:nvPr>
-        </p:nvSpPr>
-        <p:spPr/>
-        <p:txBody>
-          <a:bodyPr rtlCol="0"/>
-          <a:lstStyle>
-            <a:defPPr>
-              <a:defRPr lang="ru-MO"/>
-            </a:defPPr>
-          </a:lstStyle>
-          <a:p>
-            <a:pPr rtl="0"/>
-            <a:r>
-              <a:rPr lang="ru-RU" sz="1400" dirty="0"/>
-              <a:t>Музыка</a:t>
-            </a:r>
-          </a:p>
-        </p:txBody>
-      </p:sp>
-      <p:sp>
-        <p:nvSpPr>
-          <p:cNvPr id="27" name="Объект 26">
-            <a:extLst>
-              <a:ext uri="{FF2B5EF4-FFF2-40B4-BE49-F238E27FC236}">
-                <a16:creationId xmlns:a16="http://schemas.microsoft.com/office/drawing/2014/main" id="{5D63848E-7E38-C88A-D15E-40DF95AB07BB}"/>
-              </a:ext>
-            </a:extLst>
-          </p:cNvPr>
-          <p:cNvSpPr>
-            <a:spLocks noGrp="1"/>
-          </p:cNvSpPr>
-          <p:nvPr>
-            <p:ph sz="quarter" idx="18"/>
-          </p:nvPr>
-        </p:nvSpPr>
-        <p:spPr/>
-        <p:txBody>
-          <a:bodyPr rtlCol="0"/>
-          <a:lstStyle>
-            <a:defPPr>
-              <a:defRPr lang="ru-MO"/>
-            </a:defPPr>
-          </a:lstStyle>
-          <a:p>
-            <a:pPr lvl="0" rtl="0"/>
-            <a:r>
-              <a:rPr lang="ru-RU" sz="1300" dirty="0"/>
-              <a:t>Музыкальные эффекты насыщают игру жизнью и динамикой,</a:t>
+            <a:pPr marL="342900" indent="-342900" rtl="0">
+              <a:buFont typeface="Arial" panose="020B0604020202020204" pitchFamily="34" charset="0"/>
+              <a:buChar char="•"/>
+            </a:pPr>
+            <a:r>
+              <a:rPr lang="ru-RU" dirty="0"/>
+              <a:t>Полностью рабочий игровой процесс</a:t>
+            </a:r>
+          </a:p>
+          <a:p>
+            <a:pPr marL="342900" indent="-342900" rtl="0">
+              <a:buFont typeface="Arial" panose="020B0604020202020204" pitchFamily="34" charset="0"/>
+              <a:buChar char="•"/>
+            </a:pPr>
+            <a:r>
+              <a:rPr lang="ru-RU" dirty="0"/>
+              <a:t>Сохранение прогресса</a:t>
+            </a:r>
+          </a:p>
+          <a:p>
+            <a:pPr marL="342900" indent="-342900" rtl="0">
+              <a:buFont typeface="Arial" panose="020B0604020202020204" pitchFamily="34" charset="0"/>
+              <a:buChar char="•"/>
+            </a:pPr>
+            <a:r>
+              <a:rPr lang="ru-RU" dirty="0"/>
+              <a:t>Поддержка обучения и настроек</a:t>
             </a:r>
           </a:p>
         </p:txBody>
@@ -13989,7 +13833,7 @@
           <p:cNvPr id="8" name="Номер слайда 7">
             <a:extLst>
               <a:ext uri="{FF2B5EF4-FFF2-40B4-BE49-F238E27FC236}">
-                <a16:creationId xmlns:a16="http://schemas.microsoft.com/office/drawing/2014/main" id="{60DE4CC7-0F16-896F-1EBA-F387E12A24C3}"/>
+                <a16:creationId xmlns:a16="http://schemas.microsoft.com/office/drawing/2014/main" id="{151DE16D-6222-1703-D240-DA742BD7BEF9}"/>
               </a:ext>
             </a:extLst>
           </p:cNvPr>
@@ -14022,7 +13866,7 @@
     </p:spTree>
     <p:extLst>
       <p:ext uri="{BB962C8B-B14F-4D97-AF65-F5344CB8AC3E}">
-        <p14:creationId xmlns:p14="http://schemas.microsoft.com/office/powerpoint/2010/main" val="3008749983"/>
+        <p14:creationId xmlns:p14="http://schemas.microsoft.com/office/powerpoint/2010/main" val="2700317568"/>
       </p:ext>
     </p:extLst>
   </p:cSld>
@@ -14051,10 +13895,10 @@
       </p:grpSpPr>
       <p:sp>
         <p:nvSpPr>
-          <p:cNvPr id="41" name="Заголовок 40">
-            <a:extLst>
-              <a:ext uri="{FF2B5EF4-FFF2-40B4-BE49-F238E27FC236}">
-                <a16:creationId xmlns:a16="http://schemas.microsoft.com/office/drawing/2014/main" id="{A49ABFAC-D966-9A7C-EFB9-4AA2A4BFCB3B}"/>
+          <p:cNvPr id="2" name="Заголовок 1">
+            <a:extLst>
+              <a:ext uri="{FF2B5EF4-FFF2-40B4-BE49-F238E27FC236}">
+                <a16:creationId xmlns:a16="http://schemas.microsoft.com/office/drawing/2014/main" id="{38F5A0AD-52EA-8A3D-00F9-72C649D792FF}"/>
               </a:ext>
             </a:extLst>
           </p:cNvPr>
@@ -14076,32 +13920,32 @@
           <a:p>
             <a:pPr rtl="0"/>
             <a:r>
-              <a:rPr lang="ru-RU" dirty="0"/>
-              <a:t>Результаты</a:t>
-            </a:r>
-          </a:p>
-        </p:txBody>
-      </p:sp>
-      <p:sp>
-        <p:nvSpPr>
-          <p:cNvPr id="7" name="Нижний колонтитул 6">
-            <a:extLst>
-              <a:ext uri="{FF2B5EF4-FFF2-40B4-BE49-F238E27FC236}">
-                <a16:creationId xmlns:a16="http://schemas.microsoft.com/office/drawing/2014/main" id="{6C58156F-B502-2468-F7F7-7EF56BA44FBE}"/>
-              </a:ext>
-            </a:extLst>
-          </p:cNvPr>
-          <p:cNvSpPr>
-            <a:spLocks noGrp="1"/>
-          </p:cNvSpPr>
-          <p:nvPr>
-            <p:ph type="ftr" sz="quarter" idx="11"/>
-          </p:nvPr>
-        </p:nvSpPr>
-        <p:spPr>
-          <a:xfrm>
-            <a:off x="4038600" y="12153"/>
-            <a:ext cx="4114800" cy="856526"/>
+              <a:rPr lang="ru-RU" sz="5400" dirty="0"/>
+              <a:t>Будущие планы</a:t>
+            </a:r>
+          </a:p>
+        </p:txBody>
+      </p:sp>
+      <p:sp>
+        <p:nvSpPr>
+          <p:cNvPr id="3" name="Текст 2">
+            <a:extLst>
+              <a:ext uri="{FF2B5EF4-FFF2-40B4-BE49-F238E27FC236}">
+                <a16:creationId xmlns:a16="http://schemas.microsoft.com/office/drawing/2014/main" id="{90961576-ECF8-2387-1D6B-533B869103A2}"/>
+              </a:ext>
+            </a:extLst>
+          </p:cNvPr>
+          <p:cNvSpPr>
+            <a:spLocks noGrp="1"/>
+          </p:cNvSpPr>
+          <p:nvPr>
+            <p:ph type="body" idx="1"/>
+          </p:nvPr>
+        </p:nvSpPr>
+        <p:spPr>
+          <a:xfrm>
+            <a:off x="612648" y="2438400"/>
+            <a:ext cx="3794760" cy="884446"/>
           </a:xfrm>
         </p:spPr>
         <p:txBody>
@@ -14114,33 +13958,37 @@
           <a:p>
             <a:pPr rtl="0"/>
             <a:r>
-              <a:rPr lang="en-US" sz="1400" dirty="0"/>
-              <a:t>Cube Cascade</a:t>
-            </a:r>
-            <a:endParaRPr lang="ru-RU" sz="1400" dirty="0"/>
-          </a:p>
-        </p:txBody>
-      </p:sp>
-      <p:sp>
-        <p:nvSpPr>
-          <p:cNvPr id="42" name="Текст 41">
-            <a:extLst>
-              <a:ext uri="{FF2B5EF4-FFF2-40B4-BE49-F238E27FC236}">
-                <a16:creationId xmlns:a16="http://schemas.microsoft.com/office/drawing/2014/main" id="{E7EE4D5B-87DD-4137-0625-40623A0E8A35}"/>
-              </a:ext>
-            </a:extLst>
-          </p:cNvPr>
-          <p:cNvSpPr>
-            <a:spLocks noGrp="1"/>
-          </p:cNvSpPr>
-          <p:nvPr>
-            <p:ph type="body" idx="1"/>
-          </p:nvPr>
-        </p:nvSpPr>
-        <p:spPr>
-          <a:xfrm>
-            <a:off x="3791744" y="2636912"/>
-            <a:ext cx="5157787" cy="2178119"/>
+              <a:rPr lang="ru-RU" sz="1800" dirty="0"/>
+              <a:t>Дополнения</a:t>
+            </a:r>
+            <a:r>
+              <a:rPr lang="en-US" sz="1800" dirty="0"/>
+              <a:t>:</a:t>
+            </a:r>
+            <a:endParaRPr lang="ru-RU" sz="1800" dirty="0"/>
+          </a:p>
+        </p:txBody>
+      </p:sp>
+      <p:sp>
+        <p:nvSpPr>
+          <p:cNvPr id="4" name="Объект 3">
+            <a:extLst>
+              <a:ext uri="{FF2B5EF4-FFF2-40B4-BE49-F238E27FC236}">
+                <a16:creationId xmlns:a16="http://schemas.microsoft.com/office/drawing/2014/main" id="{642609F2-7307-B671-065E-0168414672CB}"/>
+              </a:ext>
+            </a:extLst>
+          </p:cNvPr>
+          <p:cNvSpPr>
+            <a:spLocks noGrp="1"/>
+          </p:cNvSpPr>
+          <p:nvPr>
+            <p:ph sz="half" idx="2"/>
+          </p:nvPr>
+        </p:nvSpPr>
+        <p:spPr>
+          <a:xfrm>
+            <a:off x="612648" y="3322846"/>
+            <a:ext cx="3419856" cy="2925554"/>
           </a:xfrm>
         </p:spPr>
         <p:txBody>
@@ -14151,33 +13999,217 @@
             </a:defPPr>
           </a:lstStyle>
           <a:p>
-            <a:pPr marL="342900" indent="-342900" rtl="0">
-              <a:buFont typeface="Arial" panose="020B0604020202020204" pitchFamily="34" charset="0"/>
-              <a:buChar char="•"/>
-            </a:pPr>
-            <a:r>
-              <a:rPr lang="ru-RU" dirty="0"/>
-              <a:t>Полностью рабочий игровой процесс</a:t>
-            </a:r>
-          </a:p>
-          <a:p>
-            <a:pPr marL="342900" indent="-342900" rtl="0">
-              <a:buFont typeface="Arial" panose="020B0604020202020204" pitchFamily="34" charset="0"/>
-              <a:buChar char="•"/>
-            </a:pPr>
-            <a:r>
-              <a:rPr lang="ru-RU" dirty="0"/>
-              <a:t>Сохранение прогресса</a:t>
-            </a:r>
-          </a:p>
-          <a:p>
-            <a:pPr marL="342900" indent="-342900" rtl="0">
-              <a:buFont typeface="Arial" panose="020B0604020202020204" pitchFamily="34" charset="0"/>
-              <a:buChar char="•"/>
-            </a:pPr>
-            <a:r>
-              <a:rPr lang="ru-RU" dirty="0"/>
-              <a:t>Поддержка обучения и настроек</a:t>
+            <a:pPr rtl="0"/>
+            <a:r>
+              <a:rPr lang="ru-RU" sz="1400" dirty="0" err="1"/>
+              <a:t>Мультиплеерный</a:t>
+            </a:r>
+            <a:r>
+              <a:rPr lang="ru-RU" sz="1400" dirty="0"/>
+              <a:t> режим</a:t>
+            </a:r>
+          </a:p>
+          <a:p>
+            <a:pPr rtl="0"/>
+            <a:r>
+              <a:rPr lang="ru-RU" sz="1400" dirty="0"/>
+              <a:t>Турниры и соревнования на время</a:t>
+            </a:r>
+          </a:p>
+        </p:txBody>
+      </p:sp>
+      <p:sp>
+        <p:nvSpPr>
+          <p:cNvPr id="12" name="Текст 11">
+            <a:extLst>
+              <a:ext uri="{FF2B5EF4-FFF2-40B4-BE49-F238E27FC236}">
+                <a16:creationId xmlns:a16="http://schemas.microsoft.com/office/drawing/2014/main" id="{B1A869CC-7228-424F-689B-19D4CEA20FF0}"/>
+              </a:ext>
+            </a:extLst>
+          </p:cNvPr>
+          <p:cNvSpPr>
+            <a:spLocks noGrp="1"/>
+          </p:cNvSpPr>
+          <p:nvPr>
+            <p:ph type="body" sz="quarter" idx="3"/>
+          </p:nvPr>
+        </p:nvSpPr>
+        <p:spPr/>
+        <p:txBody>
+          <a:bodyPr rtlCol="0"/>
+          <a:lstStyle>
+            <a:defPPr>
+              <a:defRPr lang="ru-MO"/>
+            </a:defPPr>
+          </a:lstStyle>
+          <a:p>
+            <a:pPr rtl="0"/>
+            <a:r>
+              <a:rPr lang="ru-RU" sz="1800" dirty="0"/>
+              <a:t>Оптимизация:</a:t>
+            </a:r>
+          </a:p>
+        </p:txBody>
+      </p:sp>
+      <p:sp>
+        <p:nvSpPr>
+          <p:cNvPr id="14" name="Объект 13">
+            <a:extLst>
+              <a:ext uri="{FF2B5EF4-FFF2-40B4-BE49-F238E27FC236}">
+                <a16:creationId xmlns:a16="http://schemas.microsoft.com/office/drawing/2014/main" id="{110B594D-EC9B-B552-2A8F-EE5113E8B143}"/>
+              </a:ext>
+            </a:extLst>
+          </p:cNvPr>
+          <p:cNvSpPr>
+            <a:spLocks noGrp="1"/>
+          </p:cNvSpPr>
+          <p:nvPr>
+            <p:ph sz="quarter" idx="4"/>
+          </p:nvPr>
+        </p:nvSpPr>
+        <p:spPr>
+          <a:xfrm>
+            <a:off x="4407408" y="3322846"/>
+            <a:ext cx="3419856" cy="2925554"/>
+          </a:xfrm>
+        </p:spPr>
+        <p:txBody>
+          <a:bodyPr rtlCol="0"/>
+          <a:lstStyle>
+            <a:defPPr>
+              <a:defRPr lang="ru-MO"/>
+            </a:defPPr>
+          </a:lstStyle>
+          <a:p>
+            <a:pPr rtl="0"/>
+            <a:r>
+              <a:rPr lang="ru-RU" sz="1400" dirty="0"/>
+              <a:t>Улучшение визуальных эффектов</a:t>
+            </a:r>
+          </a:p>
+          <a:p>
+            <a:pPr rtl="0"/>
+            <a:r>
+              <a:rPr lang="ru-RU" sz="1400" dirty="0"/>
+              <a:t>Поддержка на других </a:t>
+            </a:r>
+            <a:r>
+              <a:rPr lang="ru-RU" sz="1400" dirty="0" err="1"/>
+              <a:t>устроуствах</a:t>
+            </a:r>
+            <a:endParaRPr lang="ru-RU" sz="1400" dirty="0"/>
+          </a:p>
+          <a:p>
+            <a:pPr rtl="0"/>
+            <a:endParaRPr lang="ru-RU" sz="1400" dirty="0"/>
+          </a:p>
+        </p:txBody>
+      </p:sp>
+      <p:sp>
+        <p:nvSpPr>
+          <p:cNvPr id="9" name="Текст 8">
+            <a:extLst>
+              <a:ext uri="{FF2B5EF4-FFF2-40B4-BE49-F238E27FC236}">
+                <a16:creationId xmlns:a16="http://schemas.microsoft.com/office/drawing/2014/main" id="{EBAA58E7-F0D8-F39A-CEFD-71E5913073EF}"/>
+              </a:ext>
+            </a:extLst>
+          </p:cNvPr>
+          <p:cNvSpPr>
+            <a:spLocks noGrp="1"/>
+          </p:cNvSpPr>
+          <p:nvPr>
+            <p:ph type="body" sz="quarter" idx="13"/>
+          </p:nvPr>
+        </p:nvSpPr>
+        <p:spPr/>
+        <p:txBody>
+          <a:bodyPr rtlCol="0"/>
+          <a:lstStyle>
+            <a:defPPr>
+              <a:defRPr lang="ru-MO"/>
+            </a:defPPr>
+          </a:lstStyle>
+          <a:p>
+            <a:pPr rtl="0"/>
+            <a:r>
+              <a:rPr lang="ru-RU" sz="1800" dirty="0"/>
+              <a:t>Публикация:</a:t>
+            </a:r>
+          </a:p>
+        </p:txBody>
+      </p:sp>
+      <p:sp>
+        <p:nvSpPr>
+          <p:cNvPr id="10" name="Объект 9">
+            <a:extLst>
+              <a:ext uri="{FF2B5EF4-FFF2-40B4-BE49-F238E27FC236}">
+                <a16:creationId xmlns:a16="http://schemas.microsoft.com/office/drawing/2014/main" id="{E54F306D-CD94-F11A-8633-26962EE68BF7}"/>
+              </a:ext>
+            </a:extLst>
+          </p:cNvPr>
+          <p:cNvSpPr>
+            <a:spLocks noGrp="1"/>
+          </p:cNvSpPr>
+          <p:nvPr>
+            <p:ph sz="quarter" idx="14"/>
+          </p:nvPr>
+        </p:nvSpPr>
+        <p:spPr>
+          <a:xfrm>
+            <a:off x="8183880" y="3322846"/>
+            <a:ext cx="3419856" cy="2925554"/>
+          </a:xfrm>
+        </p:spPr>
+        <p:txBody>
+          <a:bodyPr rtlCol="0"/>
+          <a:lstStyle>
+            <a:defPPr>
+              <a:defRPr lang="ru-MO"/>
+            </a:defPPr>
+          </a:lstStyle>
+          <a:p>
+            <a:pPr rtl="0"/>
+            <a:r>
+              <a:rPr lang="ru-RU" sz="1400" dirty="0"/>
+              <a:t>Выпуск игры на платформы (например, </a:t>
+            </a:r>
+            <a:r>
+              <a:rPr lang="en-US" sz="1400" dirty="0"/>
+              <a:t>Steam)</a:t>
+            </a:r>
+            <a:endParaRPr lang="ru-RU" sz="1400" dirty="0"/>
+          </a:p>
+        </p:txBody>
+      </p:sp>
+      <p:sp>
+        <p:nvSpPr>
+          <p:cNvPr id="7" name="Нижний колонтитул 6">
+            <a:extLst>
+              <a:ext uri="{FF2B5EF4-FFF2-40B4-BE49-F238E27FC236}">
+                <a16:creationId xmlns:a16="http://schemas.microsoft.com/office/drawing/2014/main" id="{0E08FD8E-3A0A-CCD4-5C2F-5B65BE73CBC5}"/>
+              </a:ext>
+            </a:extLst>
+          </p:cNvPr>
+          <p:cNvSpPr>
+            <a:spLocks noGrp="1"/>
+          </p:cNvSpPr>
+          <p:nvPr>
+            <p:ph type="ftr" sz="quarter" idx="11"/>
+          </p:nvPr>
+        </p:nvSpPr>
+        <p:spPr/>
+        <p:txBody>
+          <a:bodyPr rtlCol="0"/>
+          <a:lstStyle>
+            <a:defPPr>
+              <a:defRPr lang="ru-MO"/>
+            </a:defPPr>
+          </a:lstStyle>
+          <a:p>
+            <a:pPr rtl="0"/>
+            <a:r>
+              <a:rPr lang="ru-RU"/>
+              <a:t>ЗАГОЛОВОК ПРЕЗЕНТАЦИИ</a:t>
             </a:r>
           </a:p>
         </p:txBody>
@@ -14187,7 +14219,7 @@
           <p:cNvPr id="8" name="Номер слайда 7">
             <a:extLst>
               <a:ext uri="{FF2B5EF4-FFF2-40B4-BE49-F238E27FC236}">
-                <a16:creationId xmlns:a16="http://schemas.microsoft.com/office/drawing/2014/main" id="{151DE16D-6222-1703-D240-DA742BD7BEF9}"/>
+                <a16:creationId xmlns:a16="http://schemas.microsoft.com/office/drawing/2014/main" id="{94786B75-8C5A-A01F-F202-D3CB14D3031F}"/>
               </a:ext>
             </a:extLst>
           </p:cNvPr>
@@ -14212,392 +14244,6 @@
               <a:rPr lang="ru-RU" smtClean="0"/>
               <a:pPr rtl="0"/>
               <a:t>11</a:t>
-            </a:fld>
-            <a:endParaRPr lang="ru-RU"/>
-          </a:p>
-        </p:txBody>
-      </p:sp>
-    </p:spTree>
-    <p:extLst>
-      <p:ext uri="{BB962C8B-B14F-4D97-AF65-F5344CB8AC3E}">
-        <p14:creationId xmlns:p14="http://schemas.microsoft.com/office/powerpoint/2010/main" val="2700317568"/>
-      </p:ext>
-    </p:extLst>
-  </p:cSld>
-  <p:clrMapOvr>
-    <a:masterClrMapping/>
-  </p:clrMapOvr>
-</p:sld>
-</file>
-
-<file path=ppt/slides/slide12.xml><?xml version="1.0" encoding="utf-8"?>
-<p:sld xmlns:a="http://schemas.openxmlformats.org/drawingml/2006/main" xmlns:r="http://schemas.openxmlformats.org/officeDocument/2006/relationships" xmlns:p="http://schemas.openxmlformats.org/presentationml/2006/main">
-  <p:cSld>
-    <p:spTree>
-      <p:nvGrpSpPr>
-        <p:cNvPr id="1" name=""/>
-        <p:cNvGrpSpPr/>
-        <p:nvPr/>
-      </p:nvGrpSpPr>
-      <p:grpSpPr>
-        <a:xfrm>
-          <a:off x="0" y="0"/>
-          <a:ext cx="0" cy="0"/>
-          <a:chOff x="0" y="0"/>
-          <a:chExt cx="0" cy="0"/>
-        </a:xfrm>
-      </p:grpSpPr>
-      <p:sp>
-        <p:nvSpPr>
-          <p:cNvPr id="2" name="Заголовок 1">
-            <a:extLst>
-              <a:ext uri="{FF2B5EF4-FFF2-40B4-BE49-F238E27FC236}">
-                <a16:creationId xmlns:a16="http://schemas.microsoft.com/office/drawing/2014/main" id="{38F5A0AD-52EA-8A3D-00F9-72C649D792FF}"/>
-              </a:ext>
-            </a:extLst>
-          </p:cNvPr>
-          <p:cNvSpPr>
-            <a:spLocks noGrp="1"/>
-          </p:cNvSpPr>
-          <p:nvPr>
-            <p:ph type="title"/>
-          </p:nvPr>
-        </p:nvSpPr>
-        <p:spPr/>
-        <p:txBody>
-          <a:bodyPr rtlCol="0"/>
-          <a:lstStyle>
-            <a:defPPr>
-              <a:defRPr lang="ru-MO"/>
-            </a:defPPr>
-          </a:lstStyle>
-          <a:p>
-            <a:pPr rtl="0"/>
-            <a:r>
-              <a:rPr lang="ru-RU" sz="5400" dirty="0"/>
-              <a:t>Будущие планы</a:t>
-            </a:r>
-          </a:p>
-        </p:txBody>
-      </p:sp>
-      <p:sp>
-        <p:nvSpPr>
-          <p:cNvPr id="3" name="Текст 2">
-            <a:extLst>
-              <a:ext uri="{FF2B5EF4-FFF2-40B4-BE49-F238E27FC236}">
-                <a16:creationId xmlns:a16="http://schemas.microsoft.com/office/drawing/2014/main" id="{90961576-ECF8-2387-1D6B-533B869103A2}"/>
-              </a:ext>
-            </a:extLst>
-          </p:cNvPr>
-          <p:cNvSpPr>
-            <a:spLocks noGrp="1"/>
-          </p:cNvSpPr>
-          <p:nvPr>
-            <p:ph type="body" idx="1"/>
-          </p:nvPr>
-        </p:nvSpPr>
-        <p:spPr>
-          <a:xfrm>
-            <a:off x="612648" y="2438400"/>
-            <a:ext cx="3794760" cy="884446"/>
-          </a:xfrm>
-        </p:spPr>
-        <p:txBody>
-          <a:bodyPr rtlCol="0"/>
-          <a:lstStyle>
-            <a:defPPr>
-              <a:defRPr lang="ru-MO"/>
-            </a:defPPr>
-          </a:lstStyle>
-          <a:p>
-            <a:pPr rtl="0"/>
-            <a:r>
-              <a:rPr lang="ru-RU" sz="1800" dirty="0"/>
-              <a:t>Дополнения</a:t>
-            </a:r>
-            <a:r>
-              <a:rPr lang="en-US" sz="1800" dirty="0"/>
-              <a:t>:</a:t>
-            </a:r>
-            <a:endParaRPr lang="ru-RU" sz="1800" dirty="0"/>
-          </a:p>
-        </p:txBody>
-      </p:sp>
-      <p:sp>
-        <p:nvSpPr>
-          <p:cNvPr id="4" name="Объект 3">
-            <a:extLst>
-              <a:ext uri="{FF2B5EF4-FFF2-40B4-BE49-F238E27FC236}">
-                <a16:creationId xmlns:a16="http://schemas.microsoft.com/office/drawing/2014/main" id="{642609F2-7307-B671-065E-0168414672CB}"/>
-              </a:ext>
-            </a:extLst>
-          </p:cNvPr>
-          <p:cNvSpPr>
-            <a:spLocks noGrp="1"/>
-          </p:cNvSpPr>
-          <p:nvPr>
-            <p:ph sz="half" idx="2"/>
-          </p:nvPr>
-        </p:nvSpPr>
-        <p:spPr>
-          <a:xfrm>
-            <a:off x="612648" y="3322846"/>
-            <a:ext cx="3419856" cy="2925554"/>
-          </a:xfrm>
-        </p:spPr>
-        <p:txBody>
-          <a:bodyPr rtlCol="0"/>
-          <a:lstStyle>
-            <a:defPPr>
-              <a:defRPr lang="ru-MO"/>
-            </a:defPPr>
-          </a:lstStyle>
-          <a:p>
-            <a:pPr rtl="0"/>
-            <a:r>
-              <a:rPr lang="ru-RU" sz="1400" dirty="0" err="1"/>
-              <a:t>Мультиплеерный</a:t>
-            </a:r>
-            <a:r>
-              <a:rPr lang="ru-RU" sz="1400" dirty="0"/>
-              <a:t> режим</a:t>
-            </a:r>
-          </a:p>
-          <a:p>
-            <a:pPr rtl="0"/>
-            <a:r>
-              <a:rPr lang="ru-RU" sz="1400" dirty="0"/>
-              <a:t>Турниры и соревнования на время</a:t>
-            </a:r>
-          </a:p>
-        </p:txBody>
-      </p:sp>
-      <p:sp>
-        <p:nvSpPr>
-          <p:cNvPr id="12" name="Текст 11">
-            <a:extLst>
-              <a:ext uri="{FF2B5EF4-FFF2-40B4-BE49-F238E27FC236}">
-                <a16:creationId xmlns:a16="http://schemas.microsoft.com/office/drawing/2014/main" id="{B1A869CC-7228-424F-689B-19D4CEA20FF0}"/>
-              </a:ext>
-            </a:extLst>
-          </p:cNvPr>
-          <p:cNvSpPr>
-            <a:spLocks noGrp="1"/>
-          </p:cNvSpPr>
-          <p:nvPr>
-            <p:ph type="body" sz="quarter" idx="3"/>
-          </p:nvPr>
-        </p:nvSpPr>
-        <p:spPr/>
-        <p:txBody>
-          <a:bodyPr rtlCol="0"/>
-          <a:lstStyle>
-            <a:defPPr>
-              <a:defRPr lang="ru-MO"/>
-            </a:defPPr>
-          </a:lstStyle>
-          <a:p>
-            <a:pPr rtl="0"/>
-            <a:r>
-              <a:rPr lang="ru-RU" sz="1800" dirty="0"/>
-              <a:t>Оптимизация:</a:t>
-            </a:r>
-          </a:p>
-        </p:txBody>
-      </p:sp>
-      <p:sp>
-        <p:nvSpPr>
-          <p:cNvPr id="14" name="Объект 13">
-            <a:extLst>
-              <a:ext uri="{FF2B5EF4-FFF2-40B4-BE49-F238E27FC236}">
-                <a16:creationId xmlns:a16="http://schemas.microsoft.com/office/drawing/2014/main" id="{110B594D-EC9B-B552-2A8F-EE5113E8B143}"/>
-              </a:ext>
-            </a:extLst>
-          </p:cNvPr>
-          <p:cNvSpPr>
-            <a:spLocks noGrp="1"/>
-          </p:cNvSpPr>
-          <p:nvPr>
-            <p:ph sz="quarter" idx="4"/>
-          </p:nvPr>
-        </p:nvSpPr>
-        <p:spPr>
-          <a:xfrm>
-            <a:off x="4407408" y="3322846"/>
-            <a:ext cx="3419856" cy="2925554"/>
-          </a:xfrm>
-        </p:spPr>
-        <p:txBody>
-          <a:bodyPr rtlCol="0"/>
-          <a:lstStyle>
-            <a:defPPr>
-              <a:defRPr lang="ru-MO"/>
-            </a:defPPr>
-          </a:lstStyle>
-          <a:p>
-            <a:pPr rtl="0"/>
-            <a:r>
-              <a:rPr lang="ru-RU" sz="1400" dirty="0"/>
-              <a:t>Улучшение визуальных эффектов</a:t>
-            </a:r>
-          </a:p>
-          <a:p>
-            <a:pPr rtl="0"/>
-            <a:r>
-              <a:rPr lang="ru-RU" sz="1400" dirty="0"/>
-              <a:t>Поддержка на других </a:t>
-            </a:r>
-            <a:r>
-              <a:rPr lang="ru-RU" sz="1400" dirty="0" err="1"/>
-              <a:t>устроуствах</a:t>
-            </a:r>
-            <a:endParaRPr lang="ru-RU" sz="1400" dirty="0"/>
-          </a:p>
-          <a:p>
-            <a:pPr rtl="0"/>
-            <a:endParaRPr lang="ru-RU" sz="1400" dirty="0"/>
-          </a:p>
-        </p:txBody>
-      </p:sp>
-      <p:sp>
-        <p:nvSpPr>
-          <p:cNvPr id="9" name="Текст 8">
-            <a:extLst>
-              <a:ext uri="{FF2B5EF4-FFF2-40B4-BE49-F238E27FC236}">
-                <a16:creationId xmlns:a16="http://schemas.microsoft.com/office/drawing/2014/main" id="{EBAA58E7-F0D8-F39A-CEFD-71E5913073EF}"/>
-              </a:ext>
-            </a:extLst>
-          </p:cNvPr>
-          <p:cNvSpPr>
-            <a:spLocks noGrp="1"/>
-          </p:cNvSpPr>
-          <p:nvPr>
-            <p:ph type="body" sz="quarter" idx="13"/>
-          </p:nvPr>
-        </p:nvSpPr>
-        <p:spPr/>
-        <p:txBody>
-          <a:bodyPr rtlCol="0"/>
-          <a:lstStyle>
-            <a:defPPr>
-              <a:defRPr lang="ru-MO"/>
-            </a:defPPr>
-          </a:lstStyle>
-          <a:p>
-            <a:pPr rtl="0"/>
-            <a:r>
-              <a:rPr lang="ru-RU" sz="1800" dirty="0"/>
-              <a:t>Публикация:</a:t>
-            </a:r>
-          </a:p>
-        </p:txBody>
-      </p:sp>
-      <p:sp>
-        <p:nvSpPr>
-          <p:cNvPr id="10" name="Объект 9">
-            <a:extLst>
-              <a:ext uri="{FF2B5EF4-FFF2-40B4-BE49-F238E27FC236}">
-                <a16:creationId xmlns:a16="http://schemas.microsoft.com/office/drawing/2014/main" id="{E54F306D-CD94-F11A-8633-26962EE68BF7}"/>
-              </a:ext>
-            </a:extLst>
-          </p:cNvPr>
-          <p:cNvSpPr>
-            <a:spLocks noGrp="1"/>
-          </p:cNvSpPr>
-          <p:nvPr>
-            <p:ph sz="quarter" idx="14"/>
-          </p:nvPr>
-        </p:nvSpPr>
-        <p:spPr>
-          <a:xfrm>
-            <a:off x="8183880" y="3322846"/>
-            <a:ext cx="3419856" cy="2925554"/>
-          </a:xfrm>
-        </p:spPr>
-        <p:txBody>
-          <a:bodyPr rtlCol="0"/>
-          <a:lstStyle>
-            <a:defPPr>
-              <a:defRPr lang="ru-MO"/>
-            </a:defPPr>
-          </a:lstStyle>
-          <a:p>
-            <a:pPr rtl="0"/>
-            <a:r>
-              <a:rPr lang="ru-RU" sz="1400" dirty="0"/>
-              <a:t>Выпуск игры на платформы (например, </a:t>
-            </a:r>
-            <a:r>
-              <a:rPr lang="en-US" sz="1400" dirty="0"/>
-              <a:t>Steam)</a:t>
-            </a:r>
-            <a:endParaRPr lang="ru-RU" sz="1400" dirty="0"/>
-          </a:p>
-        </p:txBody>
-      </p:sp>
-      <p:sp>
-        <p:nvSpPr>
-          <p:cNvPr id="7" name="Нижний колонтитул 6">
-            <a:extLst>
-              <a:ext uri="{FF2B5EF4-FFF2-40B4-BE49-F238E27FC236}">
-                <a16:creationId xmlns:a16="http://schemas.microsoft.com/office/drawing/2014/main" id="{0E08FD8E-3A0A-CCD4-5C2F-5B65BE73CBC5}"/>
-              </a:ext>
-            </a:extLst>
-          </p:cNvPr>
-          <p:cNvSpPr>
-            <a:spLocks noGrp="1"/>
-          </p:cNvSpPr>
-          <p:nvPr>
-            <p:ph type="ftr" sz="quarter" idx="11"/>
-          </p:nvPr>
-        </p:nvSpPr>
-        <p:spPr/>
-        <p:txBody>
-          <a:bodyPr rtlCol="0"/>
-          <a:lstStyle>
-            <a:defPPr>
-              <a:defRPr lang="ru-MO"/>
-            </a:defPPr>
-          </a:lstStyle>
-          <a:p>
-            <a:pPr rtl="0"/>
-            <a:r>
-              <a:rPr lang="ru-RU"/>
-              <a:t>ЗАГОЛОВОК ПРЕЗЕНТАЦИИ</a:t>
-            </a:r>
-          </a:p>
-        </p:txBody>
-      </p:sp>
-      <p:sp>
-        <p:nvSpPr>
-          <p:cNvPr id="8" name="Номер слайда 7">
-            <a:extLst>
-              <a:ext uri="{FF2B5EF4-FFF2-40B4-BE49-F238E27FC236}">
-                <a16:creationId xmlns:a16="http://schemas.microsoft.com/office/drawing/2014/main" id="{94786B75-8C5A-A01F-F202-D3CB14D3031F}"/>
-              </a:ext>
-            </a:extLst>
-          </p:cNvPr>
-          <p:cNvSpPr>
-            <a:spLocks noGrp="1"/>
-          </p:cNvSpPr>
-          <p:nvPr>
-            <p:ph type="sldNum" sz="quarter" idx="12"/>
-          </p:nvPr>
-        </p:nvSpPr>
-        <p:spPr/>
-        <p:txBody>
-          <a:bodyPr rtlCol="0"/>
-          <a:lstStyle>
-            <a:defPPr>
-              <a:defRPr lang="ru-MO"/>
-            </a:defPPr>
-          </a:lstStyle>
-          <a:p>
-            <a:pPr rtl="0"/>
-            <a:fld id="{294A09A9-5501-47C1-A89A-A340965A2BE2}" type="slidenum">
-              <a:rPr lang="ru-RU" smtClean="0"/>
-              <a:pPr rtl="0"/>
-              <a:t>12</a:t>
             </a:fld>
             <a:endParaRPr lang="ru-RU"/>
           </a:p>
@@ -14616,7 +14262,7 @@
 </p:sld>
 </file>
 
-<file path=ppt/slides/slide13.xml><?xml version="1.0" encoding="utf-8"?>
+<file path=ppt/slides/slide12.xml><?xml version="1.0" encoding="utf-8"?>
 <p:sld xmlns:a="http://schemas.openxmlformats.org/drawingml/2006/main" xmlns:r="http://schemas.openxmlformats.org/officeDocument/2006/relationships" xmlns:p="http://schemas.openxmlformats.org/presentationml/2006/main">
   <p:cSld>
     <p:spTree>
@@ -16223,7 +15869,7 @@
           <p:nvPr>
             <p:extLst>
               <p:ext uri="{D42A27DB-BD31-4B8C-83A1-F6EECF244321}">
-                <p14:modId xmlns:p14="http://schemas.microsoft.com/office/powerpoint/2010/main" val="2561539020"/>
+                <p14:modId xmlns:p14="http://schemas.microsoft.com/office/powerpoint/2010/main" val="2866206179"/>
               </p:ext>
             </p:extLst>
           </p:nvPr>
@@ -16254,8 +15900,8 @@
         </p:nvSpPr>
         <p:spPr bwMode="auto">
           <a:xfrm>
-            <a:off x="6383618" y="4484131"/>
-            <a:ext cx="5616624" cy="1200329"/>
+            <a:off x="5785674" y="3888017"/>
+            <a:ext cx="5616624" cy="2118529"/>
           </a:xfrm>
           <a:prstGeom prst="rect">
             <a:avLst/>
@@ -16305,7 +15951,7 @@
           <a:p>
             <a:pPr marL="0" marR="0" lvl="0" indent="0" algn="l" defTabSz="914400" rtl="0" eaLnBrk="0" fontAlgn="base" latinLnBrk="0" hangingPunct="0">
               <a:lnSpc>
-                <a:spcPct val="100000"/>
+                <a:spcPct val="150000"/>
               </a:lnSpc>
               <a:spcBef>
                 <a:spcPct val="0"/>
@@ -16333,7 +15979,7 @@
           <a:p>
             <a:pPr marL="0" marR="0" lvl="0" indent="0" algn="l" defTabSz="914400" rtl="0" eaLnBrk="0" fontAlgn="base" latinLnBrk="0" hangingPunct="0">
               <a:lnSpc>
-                <a:spcPct val="100000"/>
+                <a:spcPct val="150000"/>
               </a:lnSpc>
               <a:spcBef>
                 <a:spcPct val="0"/>
@@ -16412,11 +16058,21 @@
               </a:rPr>
               <a:t>".</a:t>
             </a:r>
+            <a:endParaRPr kumimoji="0" lang="en-US" altLang="ru-RU" sz="1800" b="0" i="0" u="none" strike="noStrike" cap="none" normalizeH="0" baseline="0" dirty="0">
+              <a:ln>
+                <a:noFill/>
+              </a:ln>
+              <a:solidFill>
+                <a:schemeClr val="tx1"/>
+              </a:solidFill>
+              <a:effectLst/>
+              <a:latin typeface="Arial" panose="020B0604020202020204" pitchFamily="34" charset="0"/>
+            </a:endParaRPr>
           </a:p>
           <a:p>
             <a:pPr marL="0" marR="0" lvl="0" indent="0" algn="l" defTabSz="914400" rtl="0" eaLnBrk="0" fontAlgn="base" latinLnBrk="0" hangingPunct="0">
               <a:lnSpc>
-                <a:spcPct val="100000"/>
+                <a:spcPct val="150000"/>
               </a:lnSpc>
               <a:spcBef>
                 <a:spcPct val="0"/>
@@ -16430,21 +16086,24 @@
               <a:buChar char="•"/>
               <a:tabLst/>
             </a:pPr>
-            <a:endParaRPr kumimoji="0" lang="ru-RU" altLang="ru-RU" sz="1800" b="0" i="0" u="none" strike="noStrike" cap="none" normalizeH="0" baseline="0" dirty="0">
-              <a:ln>
-                <a:noFill/>
-              </a:ln>
-              <a:solidFill>
-                <a:schemeClr val="tx1"/>
-              </a:solidFill>
-              <a:effectLst/>
-              <a:latin typeface="Arial" panose="020B0604020202020204" pitchFamily="34" charset="0"/>
-            </a:endParaRPr>
+            <a:r>
+              <a:rPr kumimoji="0" lang="ru-RU" altLang="ru-RU" sz="1800" b="0" i="0" u="none" strike="noStrike" cap="none" normalizeH="0" baseline="0" dirty="0">
+                <a:ln>
+                  <a:noFill/>
+                </a:ln>
+                <a:solidFill>
+                  <a:schemeClr val="tx1"/>
+                </a:solidFill>
+                <a:effectLst/>
+                <a:latin typeface="Arial" panose="020B0604020202020204" pitchFamily="34" charset="0"/>
+              </a:rPr>
+              <a:t>Дополнительные кнопки Правила и поддержка авторов</a:t>
+            </a:r>
           </a:p>
           <a:p>
             <a:pPr marL="0" marR="0" lvl="0" indent="0" algn="l" defTabSz="914400" rtl="0" eaLnBrk="0" fontAlgn="base" latinLnBrk="0" hangingPunct="0">
               <a:lnSpc>
-                <a:spcPct val="100000"/>
+                <a:spcPct val="150000"/>
               </a:lnSpc>
               <a:spcBef>
                 <a:spcPct val="0"/>
@@ -16614,10 +16273,10 @@
       </p:sp>
       <p:pic>
         <p:nvPicPr>
-          <p:cNvPr id="9" name="Рисунок 8">
-            <a:extLst>
-              <a:ext uri="{FF2B5EF4-FFF2-40B4-BE49-F238E27FC236}">
-                <a16:creationId xmlns:a16="http://schemas.microsoft.com/office/drawing/2014/main" id="{A28AC309-C0FB-99D2-079A-5D1C187B569B}"/>
+          <p:cNvPr id="8" name="Рисунок 7">
+            <a:extLst>
+              <a:ext uri="{FF2B5EF4-FFF2-40B4-BE49-F238E27FC236}">
+                <a16:creationId xmlns:a16="http://schemas.microsoft.com/office/drawing/2014/main" id="{59D38B17-9449-1434-A5AB-4025BAA03238}"/>
               </a:ext>
             </a:extLst>
           </p:cNvPr>
@@ -16634,8 +16293,8 @@
         </p:blipFill>
         <p:spPr>
           <a:xfrm>
-            <a:off x="3548757" y="2060848"/>
-            <a:ext cx="5094486" cy="3816071"/>
+            <a:off x="3539428" y="2060848"/>
+            <a:ext cx="5113143" cy="3838077"/>
           </a:xfrm>
           <a:prstGeom prst="rect">
             <a:avLst/>
@@ -16688,66 +16347,56 @@
             <p:ph type="title"/>
           </p:nvPr>
         </p:nvSpPr>
-        <p:spPr/>
+        <p:spPr>
+          <a:xfrm>
+            <a:off x="609600" y="582229"/>
+            <a:ext cx="10972800" cy="1572768"/>
+          </a:xfrm>
+        </p:spPr>
         <p:txBody>
           <a:bodyPr/>
           <a:lstStyle/>
           <a:p>
-            <a:endParaRPr lang="ru-RU"/>
-          </a:p>
-        </p:txBody>
-      </p:sp>
-      <p:sp>
-        <p:nvSpPr>
-          <p:cNvPr id="3" name="Объект 2">
-            <a:extLst>
-              <a:ext uri="{FF2B5EF4-FFF2-40B4-BE49-F238E27FC236}">
-                <a16:creationId xmlns:a16="http://schemas.microsoft.com/office/drawing/2014/main" id="{29B6D84F-7994-B95E-C9F3-F72ED63D6513}"/>
-              </a:ext>
-            </a:extLst>
-          </p:cNvPr>
-          <p:cNvSpPr>
-            <a:spLocks noGrp="1"/>
-          </p:cNvSpPr>
-          <p:nvPr>
-            <p:ph sz="half" idx="2"/>
-          </p:nvPr>
-        </p:nvSpPr>
-        <p:spPr/>
+            <a:r>
+              <a:rPr lang="en-US" dirty="0"/>
+              <a:t>Adventure</a:t>
+            </a:r>
+            <a:endParaRPr lang="ru-RU" dirty="0"/>
+          </a:p>
+        </p:txBody>
+      </p:sp>
+      <p:sp>
+        <p:nvSpPr>
+          <p:cNvPr id="4" name="Нижний колонтитул 3">
+            <a:extLst>
+              <a:ext uri="{FF2B5EF4-FFF2-40B4-BE49-F238E27FC236}">
+                <a16:creationId xmlns:a16="http://schemas.microsoft.com/office/drawing/2014/main" id="{8A294F26-36C3-AC09-CBFF-931FBD0C7BDF}"/>
+              </a:ext>
+            </a:extLst>
+          </p:cNvPr>
+          <p:cNvSpPr>
+            <a:spLocks noGrp="1"/>
+          </p:cNvSpPr>
+          <p:nvPr>
+            <p:ph type="ftr" sz="quarter" idx="11"/>
+          </p:nvPr>
+        </p:nvSpPr>
+        <p:spPr>
+          <a:xfrm>
+            <a:off x="4038600" y="153966"/>
+            <a:ext cx="4114800" cy="856526"/>
+          </a:xfrm>
+        </p:spPr>
         <p:txBody>
           <a:bodyPr/>
           <a:lstStyle/>
           <a:p>
-            <a:endParaRPr lang="ru-RU"/>
-          </a:p>
-        </p:txBody>
-      </p:sp>
-      <p:sp>
-        <p:nvSpPr>
-          <p:cNvPr id="4" name="Нижний колонтитул 3">
-            <a:extLst>
-              <a:ext uri="{FF2B5EF4-FFF2-40B4-BE49-F238E27FC236}">
-                <a16:creationId xmlns:a16="http://schemas.microsoft.com/office/drawing/2014/main" id="{8A294F26-36C3-AC09-CBFF-931FBD0C7BDF}"/>
-              </a:ext>
-            </a:extLst>
-          </p:cNvPr>
-          <p:cNvSpPr>
-            <a:spLocks noGrp="1"/>
-          </p:cNvSpPr>
-          <p:nvPr>
-            <p:ph type="ftr" sz="quarter" idx="11"/>
-          </p:nvPr>
-        </p:nvSpPr>
-        <p:spPr/>
-        <p:txBody>
-          <a:bodyPr/>
-          <a:lstStyle/>
-          <a:p>
             <a:pPr rtl="0"/>
             <a:r>
-              <a:rPr lang="ru-RU" noProof="0"/>
-              <a:t>ЗАГОЛОВОК ПРЕЗЕНТАЦИИ</a:t>
-            </a:r>
+              <a:rPr lang="en-US" sz="1400" dirty="0"/>
+              <a:t>Cube Cascade</a:t>
+            </a:r>
+            <a:endParaRPr lang="ru-RU" sz="1400" noProof="0" dirty="0"/>
           </a:p>
         </p:txBody>
       </p:sp>
@@ -16781,6 +16430,36 @@
           </a:p>
         </p:txBody>
       </p:sp>
+      <p:pic>
+        <p:nvPicPr>
+          <p:cNvPr id="7" name="Рисунок 6">
+            <a:extLst>
+              <a:ext uri="{FF2B5EF4-FFF2-40B4-BE49-F238E27FC236}">
+                <a16:creationId xmlns:a16="http://schemas.microsoft.com/office/drawing/2014/main" id="{C3B41EEE-84FD-FBF3-F907-DC6687D0FD57}"/>
+              </a:ext>
+            </a:extLst>
+          </p:cNvPr>
+          <p:cNvPicPr>
+            <a:picLocks noChangeAspect="1"/>
+          </p:cNvPicPr>
+          <p:nvPr/>
+        </p:nvPicPr>
+        <p:blipFill>
+          <a:blip r:embed="rId2"/>
+          <a:stretch>
+            <a:fillRect/>
+          </a:stretch>
+        </p:blipFill>
+        <p:spPr>
+          <a:xfrm>
+            <a:off x="3251393" y="1844824"/>
+            <a:ext cx="5689214" cy="4030761"/>
+          </a:xfrm>
+          <a:prstGeom prst="rect">
+            <a:avLst/>
+          </a:prstGeom>
+        </p:spPr>
+      </p:pic>
     </p:spTree>
     <p:extLst>
       <p:ext uri="{BB962C8B-B14F-4D97-AF65-F5344CB8AC3E}">
@@ -16813,10 +16492,10 @@
       </p:grpSpPr>
       <p:sp>
         <p:nvSpPr>
-          <p:cNvPr id="6" name="Заголовок 5">
-            <a:extLst>
-              <a:ext uri="{FF2B5EF4-FFF2-40B4-BE49-F238E27FC236}">
-                <a16:creationId xmlns:a16="http://schemas.microsoft.com/office/drawing/2014/main" id="{19B727DE-9C16-360C-F34F-96B63BA5504C}"/>
+          <p:cNvPr id="16" name="Заголовок 15">
+            <a:extLst>
+              <a:ext uri="{FF2B5EF4-FFF2-40B4-BE49-F238E27FC236}">
+                <a16:creationId xmlns:a16="http://schemas.microsoft.com/office/drawing/2014/main" id="{599B5F29-ED3B-9B44-DBBE-FD28EE7733A7}"/>
               </a:ext>
             </a:extLst>
           </p:cNvPr>
@@ -16838,29 +16517,34 @@
           <a:p>
             <a:pPr rtl="0"/>
             <a:r>
-              <a:rPr lang="ru-RU"/>
-              <a:t>Удачные возможности для бизнеса похожи на автобусы. Всегда появится следующая.</a:t>
-            </a:r>
-          </a:p>
-        </p:txBody>
-      </p:sp>
-      <p:sp>
-        <p:nvSpPr>
-          <p:cNvPr id="7" name="Текст 6">
-            <a:extLst>
-              <a:ext uri="{FF2B5EF4-FFF2-40B4-BE49-F238E27FC236}">
-                <a16:creationId xmlns:a16="http://schemas.microsoft.com/office/drawing/2014/main" id="{4067AB90-919C-547C-EA0C-C5763E0BC234}"/>
-              </a:ext>
-            </a:extLst>
-          </p:cNvPr>
-          <p:cNvSpPr>
-            <a:spLocks noGrp="1"/>
-          </p:cNvSpPr>
-          <p:nvPr>
-            <p:ph type="body" sz="quarter" idx="13"/>
-          </p:nvPr>
-        </p:nvSpPr>
-        <p:spPr/>
+              <a:rPr lang="ru-RU" dirty="0"/>
+              <a:t>Архитектура проекта</a:t>
+            </a:r>
+          </a:p>
+        </p:txBody>
+      </p:sp>
+      <p:sp>
+        <p:nvSpPr>
+          <p:cNvPr id="2" name="Нижний колонтитул 1">
+            <a:extLst>
+              <a:ext uri="{FF2B5EF4-FFF2-40B4-BE49-F238E27FC236}">
+                <a16:creationId xmlns:a16="http://schemas.microsoft.com/office/drawing/2014/main" id="{91A8AD5F-DCF2-F71C-E7E2-C2FD42878531}"/>
+              </a:ext>
+            </a:extLst>
+          </p:cNvPr>
+          <p:cNvSpPr>
+            <a:spLocks noGrp="1"/>
+          </p:cNvSpPr>
+          <p:nvPr>
+            <p:ph type="ftr" sz="quarter" idx="11"/>
+          </p:nvPr>
+        </p:nvSpPr>
+        <p:spPr>
+          <a:xfrm>
+            <a:off x="4038600" y="127849"/>
+            <a:ext cx="4114800" cy="856526"/>
+          </a:xfrm>
+        </p:spPr>
         <p:txBody>
           <a:bodyPr rtlCol="0"/>
           <a:lstStyle>
@@ -16871,29 +16555,35 @@
           <a:p>
             <a:pPr rtl="0"/>
             <a:r>
-              <a:rPr lang="ru-RU"/>
-              <a:t>Ричард Брэнсон</a:t>
-            </a:r>
-          </a:p>
-        </p:txBody>
-      </p:sp>
-      <p:sp>
-        <p:nvSpPr>
-          <p:cNvPr id="11" name="Текст 10">
-            <a:extLst>
-              <a:ext uri="{FF2B5EF4-FFF2-40B4-BE49-F238E27FC236}">
-                <a16:creationId xmlns:a16="http://schemas.microsoft.com/office/drawing/2014/main" id="{838F1D27-7C00-ADDA-3E62-FDBF008D5DDE}"/>
-              </a:ext>
-            </a:extLst>
-          </p:cNvPr>
-          <p:cNvSpPr>
-            <a:spLocks noGrp="1"/>
-          </p:cNvSpPr>
-          <p:nvPr>
-            <p:ph type="body" sz="quarter" idx="15"/>
-          </p:nvPr>
-        </p:nvSpPr>
-        <p:spPr/>
+              <a:rPr lang="en-US" sz="1400" dirty="0"/>
+              <a:t>Cube Cascade</a:t>
+            </a:r>
+            <a:endParaRPr lang="ru-RU" sz="1400" dirty="0"/>
+          </a:p>
+        </p:txBody>
+      </p:sp>
+      <p:sp>
+        <p:nvSpPr>
+          <p:cNvPr id="8" name="Текст 7">
+            <a:extLst>
+              <a:ext uri="{FF2B5EF4-FFF2-40B4-BE49-F238E27FC236}">
+                <a16:creationId xmlns:a16="http://schemas.microsoft.com/office/drawing/2014/main" id="{F07ACA27-076A-FAA7-417C-5BC0A85F36AF}"/>
+              </a:ext>
+            </a:extLst>
+          </p:cNvPr>
+          <p:cNvSpPr>
+            <a:spLocks noGrp="1"/>
+          </p:cNvSpPr>
+          <p:nvPr>
+            <p:ph type="body" sz="quarter" idx="17"/>
+          </p:nvPr>
+        </p:nvSpPr>
+        <p:spPr>
+          <a:xfrm>
+            <a:off x="858956" y="2415263"/>
+            <a:ext cx="2286000" cy="274320"/>
+          </a:xfrm>
+        </p:spPr>
         <p:txBody>
           <a:bodyPr rtlCol="0"/>
           <a:lstStyle>
@@ -16904,29 +16594,34 @@
           <a:p>
             <a:pPr rtl="0"/>
             <a:r>
-              <a:rPr lang="ru-RU"/>
-              <a:t>”</a:t>
-            </a:r>
-          </a:p>
-        </p:txBody>
-      </p:sp>
-      <p:sp>
-        <p:nvSpPr>
-          <p:cNvPr id="10" name="Текст 9">
-            <a:extLst>
-              <a:ext uri="{FF2B5EF4-FFF2-40B4-BE49-F238E27FC236}">
-                <a16:creationId xmlns:a16="http://schemas.microsoft.com/office/drawing/2014/main" id="{65E24183-EEFA-02B9-BFB3-2C57E0B5A3FD}"/>
-              </a:ext>
-            </a:extLst>
-          </p:cNvPr>
-          <p:cNvSpPr>
-            <a:spLocks noGrp="1"/>
-          </p:cNvSpPr>
-          <p:nvPr>
-            <p:ph type="body" sz="quarter" idx="14"/>
-          </p:nvPr>
-        </p:nvSpPr>
-        <p:spPr/>
+              <a:rPr lang="ru-RU" sz="2000" dirty="0"/>
+              <a:t>модули</a:t>
+            </a:r>
+          </a:p>
+        </p:txBody>
+      </p:sp>
+      <p:sp>
+        <p:nvSpPr>
+          <p:cNvPr id="9" name="Текст 8">
+            <a:extLst>
+              <a:ext uri="{FF2B5EF4-FFF2-40B4-BE49-F238E27FC236}">
+                <a16:creationId xmlns:a16="http://schemas.microsoft.com/office/drawing/2014/main" id="{D59ACCB8-2E44-8B01-9BCD-7AD37DA20F2E}"/>
+              </a:ext>
+            </a:extLst>
+          </p:cNvPr>
+          <p:cNvSpPr>
+            <a:spLocks noGrp="1"/>
+          </p:cNvSpPr>
+          <p:nvPr>
+            <p:ph type="body" sz="quarter" idx="18"/>
+          </p:nvPr>
+        </p:nvSpPr>
+        <p:spPr>
+          <a:xfrm>
+            <a:off x="858956" y="2754014"/>
+            <a:ext cx="2286000" cy="674986"/>
+          </a:xfrm>
+        </p:spPr>
         <p:txBody>
           <a:bodyPr rtlCol="0"/>
           <a:lstStyle>
@@ -16935,18 +16630,419 @@
             </a:defPPr>
           </a:lstStyle>
           <a:p>
+            <a:pPr rtl="0">
+              <a:lnSpc>
+                <a:spcPct val="150000"/>
+              </a:lnSpc>
+            </a:pPr>
+            <a:r>
+              <a:rPr lang="en-US" sz="1400" i="1" dirty="0" err="1"/>
+              <a:t>PyGame</a:t>
+            </a:r>
+            <a:endParaRPr lang="en-US" sz="1400" i="1" dirty="0"/>
+          </a:p>
+          <a:p>
+            <a:pPr rtl="0">
+              <a:lnSpc>
+                <a:spcPct val="150000"/>
+              </a:lnSpc>
+            </a:pPr>
+            <a:r>
+              <a:rPr lang="en-US" sz="1400" i="1" dirty="0"/>
+              <a:t>SQLite</a:t>
+            </a:r>
+            <a:endParaRPr lang="ru-RU" sz="1400" i="1" dirty="0"/>
+          </a:p>
+        </p:txBody>
+      </p:sp>
+      <p:sp>
+        <p:nvSpPr>
+          <p:cNvPr id="10" name="Текст 9">
+            <a:extLst>
+              <a:ext uri="{FF2B5EF4-FFF2-40B4-BE49-F238E27FC236}">
+                <a16:creationId xmlns:a16="http://schemas.microsoft.com/office/drawing/2014/main" id="{5670C16D-9661-482A-986D-0D6CB98AB869}"/>
+              </a:ext>
+            </a:extLst>
+          </p:cNvPr>
+          <p:cNvSpPr>
+            <a:spLocks noGrp="1"/>
+          </p:cNvSpPr>
+          <p:nvPr>
+            <p:ph type="body" sz="quarter" idx="19"/>
+          </p:nvPr>
+        </p:nvSpPr>
+        <p:spPr>
+          <a:xfrm>
+            <a:off x="3627305" y="2415263"/>
+            <a:ext cx="2286000" cy="274320"/>
+          </a:xfrm>
+        </p:spPr>
+        <p:txBody>
+          <a:bodyPr rtlCol="0"/>
+          <a:lstStyle>
+            <a:defPPr>
+              <a:defRPr lang="ru-MO"/>
+            </a:defPPr>
+          </a:lstStyle>
+          <a:p>
+            <a:r>
+              <a:rPr lang="ru-RU" sz="2000" dirty="0"/>
+              <a:t>классы</a:t>
+            </a:r>
+          </a:p>
+        </p:txBody>
+      </p:sp>
+      <p:sp>
+        <p:nvSpPr>
+          <p:cNvPr id="11" name="Текст 10">
+            <a:extLst>
+              <a:ext uri="{FF2B5EF4-FFF2-40B4-BE49-F238E27FC236}">
+                <a16:creationId xmlns:a16="http://schemas.microsoft.com/office/drawing/2014/main" id="{22115526-AEC6-C024-712E-E6CC8FB60E4D}"/>
+              </a:ext>
+            </a:extLst>
+          </p:cNvPr>
+          <p:cNvSpPr>
+            <a:spLocks noGrp="1"/>
+          </p:cNvSpPr>
+          <p:nvPr>
+            <p:ph type="body" sz="quarter" idx="20"/>
+          </p:nvPr>
+        </p:nvSpPr>
+        <p:spPr>
+          <a:xfrm>
+            <a:off x="3627305" y="2754014"/>
+            <a:ext cx="2286000" cy="1388220"/>
+          </a:xfrm>
+        </p:spPr>
+        <p:txBody>
+          <a:bodyPr rtlCol="0"/>
+          <a:lstStyle>
+            <a:defPPr>
+              <a:defRPr lang="ru-MO"/>
+            </a:defPPr>
+          </a:lstStyle>
+          <a:p>
+            <a:pPr>
+              <a:lnSpc>
+                <a:spcPct val="150000"/>
+              </a:lnSpc>
+            </a:pPr>
+            <a:r>
+              <a:rPr lang="en-US" sz="1400" i="1" dirty="0"/>
+              <a:t>Grid</a:t>
+            </a:r>
+          </a:p>
+          <a:p>
+            <a:pPr>
+              <a:lnSpc>
+                <a:spcPct val="150000"/>
+              </a:lnSpc>
+            </a:pPr>
+            <a:r>
+              <a:rPr lang="en-US" sz="1400" i="1" dirty="0"/>
+              <a:t>Shape</a:t>
+            </a:r>
+          </a:p>
+          <a:p>
+            <a:pPr>
+              <a:lnSpc>
+                <a:spcPct val="150000"/>
+              </a:lnSpc>
+            </a:pPr>
+            <a:r>
+              <a:rPr lang="en-US" sz="1400" i="1" dirty="0"/>
+              <a:t>Button</a:t>
+            </a:r>
+          </a:p>
+          <a:p>
+            <a:pPr>
+              <a:lnSpc>
+                <a:spcPct val="150000"/>
+              </a:lnSpc>
+            </a:pPr>
+            <a:r>
+              <a:rPr lang="en-US" sz="1400" i="1" dirty="0"/>
+              <a:t>Adventure</a:t>
+            </a:r>
+            <a:endParaRPr lang="ru-RU" sz="1400" i="1" dirty="0"/>
+          </a:p>
+        </p:txBody>
+      </p:sp>
+      <p:sp>
+        <p:nvSpPr>
+          <p:cNvPr id="12" name="Текст 11">
+            <a:extLst>
+              <a:ext uri="{FF2B5EF4-FFF2-40B4-BE49-F238E27FC236}">
+                <a16:creationId xmlns:a16="http://schemas.microsoft.com/office/drawing/2014/main" id="{E26CB388-D0E5-9548-A57B-8A5352089E15}"/>
+              </a:ext>
+            </a:extLst>
+          </p:cNvPr>
+          <p:cNvSpPr>
+            <a:spLocks noGrp="1"/>
+          </p:cNvSpPr>
+          <p:nvPr>
+            <p:ph type="body" sz="quarter" idx="21"/>
+          </p:nvPr>
+        </p:nvSpPr>
+        <p:spPr>
+          <a:xfrm>
+            <a:off x="6017915" y="2456553"/>
+            <a:ext cx="2969912" cy="233030"/>
+          </a:xfrm>
+        </p:spPr>
+        <p:txBody>
+          <a:bodyPr rtlCol="0"/>
+          <a:lstStyle>
+            <a:defPPr>
+              <a:defRPr lang="ru-MO"/>
+            </a:defPPr>
+          </a:lstStyle>
+          <a:p>
+            <a:r>
+              <a:rPr lang="ru-RU" sz="2000" dirty="0"/>
+              <a:t>технологии</a:t>
+            </a:r>
+          </a:p>
+        </p:txBody>
+      </p:sp>
+      <p:sp>
+        <p:nvSpPr>
+          <p:cNvPr id="13" name="Текст 12">
+            <a:extLst>
+              <a:ext uri="{FF2B5EF4-FFF2-40B4-BE49-F238E27FC236}">
+                <a16:creationId xmlns:a16="http://schemas.microsoft.com/office/drawing/2014/main" id="{7DA1EEF4-1C46-B9FD-302F-61FC0265F748}"/>
+              </a:ext>
+            </a:extLst>
+          </p:cNvPr>
+          <p:cNvSpPr>
+            <a:spLocks noGrp="1"/>
+          </p:cNvSpPr>
+          <p:nvPr>
+            <p:ph type="body" sz="quarter" idx="22"/>
+          </p:nvPr>
+        </p:nvSpPr>
+        <p:spPr>
+          <a:xfrm>
+            <a:off x="6359871" y="2751728"/>
+            <a:ext cx="2286000" cy="1388220"/>
+          </a:xfrm>
+        </p:spPr>
+        <p:txBody>
+          <a:bodyPr rtlCol="0"/>
+          <a:lstStyle>
+            <a:defPPr>
+              <a:defRPr lang="ru-MO"/>
+            </a:defPPr>
+          </a:lstStyle>
+          <a:p>
+            <a:pPr rtl="0">
+              <a:lnSpc>
+                <a:spcPct val="150000"/>
+              </a:lnSpc>
+            </a:pPr>
+            <a:r>
+              <a:rPr lang="en-US" sz="1400" i="1" dirty="0"/>
+              <a:t>Python 3</a:t>
+            </a:r>
+          </a:p>
+          <a:p>
+            <a:pPr rtl="0">
+              <a:lnSpc>
+                <a:spcPct val="150000"/>
+              </a:lnSpc>
+            </a:pPr>
+            <a:r>
+              <a:rPr lang="en-US" sz="1400" i="1" dirty="0" err="1"/>
+              <a:t>PyGame</a:t>
+            </a:r>
+            <a:endParaRPr lang="en-US" sz="1400" i="1" dirty="0"/>
+          </a:p>
+          <a:p>
+            <a:pPr rtl="0">
+              <a:lnSpc>
+                <a:spcPct val="150000"/>
+              </a:lnSpc>
+            </a:pPr>
+            <a:r>
+              <a:rPr lang="en-US" sz="1400" i="1" dirty="0"/>
+              <a:t>SQLite Studio</a:t>
+            </a:r>
+          </a:p>
+          <a:p>
+            <a:pPr rtl="0">
+              <a:lnSpc>
+                <a:spcPct val="150000"/>
+              </a:lnSpc>
+            </a:pPr>
+            <a:r>
+              <a:rPr lang="en-US" sz="1400" i="1" dirty="0"/>
+              <a:t>Random</a:t>
+            </a:r>
+          </a:p>
+        </p:txBody>
+      </p:sp>
+      <p:sp>
+        <p:nvSpPr>
+          <p:cNvPr id="14" name="Текст 13">
+            <a:extLst>
+              <a:ext uri="{FF2B5EF4-FFF2-40B4-BE49-F238E27FC236}">
+                <a16:creationId xmlns:a16="http://schemas.microsoft.com/office/drawing/2014/main" id="{519D9E81-2623-349E-904D-8BF6ECE353BA}"/>
+              </a:ext>
+            </a:extLst>
+          </p:cNvPr>
+          <p:cNvSpPr>
+            <a:spLocks noGrp="1"/>
+          </p:cNvSpPr>
+          <p:nvPr>
+            <p:ph type="body" sz="quarter" idx="23"/>
+          </p:nvPr>
+        </p:nvSpPr>
+        <p:spPr>
+          <a:xfrm>
+            <a:off x="9095930" y="2418762"/>
+            <a:ext cx="2286000" cy="274320"/>
+          </a:xfrm>
+        </p:spPr>
+        <p:txBody>
+          <a:bodyPr rtlCol="0"/>
+          <a:lstStyle>
+            <a:defPPr>
+              <a:defRPr lang="ru-MO"/>
+            </a:defPPr>
+          </a:lstStyle>
+          <a:p>
+            <a:r>
+              <a:rPr lang="ru-RU" sz="2000" dirty="0"/>
+              <a:t>таблицы</a:t>
+            </a:r>
+          </a:p>
+        </p:txBody>
+      </p:sp>
+      <p:sp>
+        <p:nvSpPr>
+          <p:cNvPr id="15" name="Текст 14">
+            <a:extLst>
+              <a:ext uri="{FF2B5EF4-FFF2-40B4-BE49-F238E27FC236}">
+                <a16:creationId xmlns:a16="http://schemas.microsoft.com/office/drawing/2014/main" id="{2FC00352-D201-B54A-FE76-985161F19FEC}"/>
+              </a:ext>
+            </a:extLst>
+          </p:cNvPr>
+          <p:cNvSpPr>
+            <a:spLocks noGrp="1"/>
+          </p:cNvSpPr>
+          <p:nvPr>
+            <p:ph type="body" sz="quarter" idx="24"/>
+          </p:nvPr>
+        </p:nvSpPr>
+        <p:spPr>
+          <a:xfrm>
+            <a:off x="9128220" y="2767534"/>
+            <a:ext cx="2286000" cy="1741586"/>
+          </a:xfrm>
+        </p:spPr>
+        <p:txBody>
+          <a:bodyPr rtlCol="0"/>
+          <a:lstStyle>
+            <a:defPPr>
+              <a:defRPr lang="ru-MO"/>
+            </a:defPPr>
+          </a:lstStyle>
+          <a:p>
+            <a:pPr>
+              <a:lnSpc>
+                <a:spcPct val="150000"/>
+              </a:lnSpc>
+            </a:pPr>
+            <a:r>
+              <a:rPr lang="en-US" sz="1400" i="1" dirty="0"/>
+              <a:t>Adventure grid</a:t>
+            </a:r>
+          </a:p>
+          <a:p>
+            <a:pPr>
+              <a:lnSpc>
+                <a:spcPct val="150000"/>
+              </a:lnSpc>
+            </a:pPr>
+            <a:r>
+              <a:rPr lang="en-US" sz="1400" i="1" dirty="0"/>
+              <a:t>Classic grid</a:t>
+            </a:r>
+          </a:p>
+          <a:p>
+            <a:pPr>
+              <a:lnSpc>
+                <a:spcPct val="150000"/>
+              </a:lnSpc>
+            </a:pPr>
+            <a:r>
+              <a:rPr lang="en-US" sz="1400" i="1" dirty="0"/>
+              <a:t>Levels</a:t>
+            </a:r>
+          </a:p>
+          <a:p>
+            <a:pPr>
+              <a:lnSpc>
+                <a:spcPct val="150000"/>
+              </a:lnSpc>
+            </a:pPr>
+            <a:r>
+              <a:rPr lang="en-US" sz="1400" i="1" dirty="0"/>
+              <a:t>Pieces</a:t>
+            </a:r>
+          </a:p>
+          <a:p>
+            <a:pPr>
+              <a:lnSpc>
+                <a:spcPct val="150000"/>
+              </a:lnSpc>
+            </a:pPr>
+            <a:r>
+              <a:rPr lang="en-US" sz="1400" i="1" dirty="0"/>
+              <a:t>Scores</a:t>
+            </a:r>
+          </a:p>
+        </p:txBody>
+      </p:sp>
+      <p:sp>
+        <p:nvSpPr>
+          <p:cNvPr id="3" name="Номер слайда 2">
+            <a:extLst>
+              <a:ext uri="{FF2B5EF4-FFF2-40B4-BE49-F238E27FC236}">
+                <a16:creationId xmlns:a16="http://schemas.microsoft.com/office/drawing/2014/main" id="{C11CC6B6-E9D4-1736-ABF6-727D2464A975}"/>
+              </a:ext>
+            </a:extLst>
+          </p:cNvPr>
+          <p:cNvSpPr>
+            <a:spLocks noGrp="1"/>
+          </p:cNvSpPr>
+          <p:nvPr>
+            <p:ph type="sldNum" sz="quarter" idx="12"/>
+          </p:nvPr>
+        </p:nvSpPr>
+        <p:spPr/>
+        <p:txBody>
+          <a:bodyPr rtlCol="0"/>
+          <a:lstStyle>
+            <a:defPPr>
+              <a:defRPr lang="ru-MO"/>
+            </a:defPPr>
+          </a:lstStyle>
+          <a:p>
             <a:pPr rtl="0"/>
-            <a:r>
-              <a:rPr lang="ru-RU"/>
-              <a:t>“</a:t>
-            </a:r>
+            <a:fld id="{294A09A9-5501-47C1-A89A-A340965A2BE2}" type="slidenum">
+              <a:rPr lang="ru-RU" smtClean="0"/>
+              <a:pPr rtl="0"/>
+              <a:t>8</a:t>
+            </a:fld>
+            <a:endParaRPr lang="ru-RU"/>
           </a:p>
         </p:txBody>
       </p:sp>
     </p:spTree>
     <p:extLst>
       <p:ext uri="{BB962C8B-B14F-4D97-AF65-F5344CB8AC3E}">
-        <p14:creationId xmlns:p14="http://schemas.microsoft.com/office/powerpoint/2010/main" val="2113713740"/>
+        <p14:creationId xmlns:p14="http://schemas.microsoft.com/office/powerpoint/2010/main" val="4028410468"/>
       </p:ext>
     </p:extLst>
   </p:cSld>
@@ -16975,10 +17071,10 @@
       </p:grpSpPr>
       <p:sp>
         <p:nvSpPr>
-          <p:cNvPr id="16" name="Заголовок 15">
-            <a:extLst>
-              <a:ext uri="{FF2B5EF4-FFF2-40B4-BE49-F238E27FC236}">
-                <a16:creationId xmlns:a16="http://schemas.microsoft.com/office/drawing/2014/main" id="{599B5F29-ED3B-9B44-DBBE-FD28EE7733A7}"/>
+          <p:cNvPr id="2" name="Заголовок 1">
+            <a:extLst>
+              <a:ext uri="{FF2B5EF4-FFF2-40B4-BE49-F238E27FC236}">
+                <a16:creationId xmlns:a16="http://schemas.microsoft.com/office/drawing/2014/main" id="{08737D19-4D60-B5D0-74C9-46A5D81261BB}"/>
               </a:ext>
             </a:extLst>
           </p:cNvPr>
@@ -16989,7 +17085,12 @@
             <p:ph type="title"/>
           </p:nvPr>
         </p:nvSpPr>
-        <p:spPr/>
+        <p:spPr>
+          <a:xfrm>
+            <a:off x="612648" y="725005"/>
+            <a:ext cx="10972800" cy="1572768"/>
+          </a:xfrm>
+        </p:spPr>
         <p:txBody>
           <a:bodyPr rtlCol="0"/>
           <a:lstStyle>
@@ -17001,17 +17102,17 @@
             <a:pPr rtl="0"/>
             <a:r>
               <a:rPr lang="ru-RU" dirty="0"/>
-              <a:t>Архитектура проекта</a:t>
-            </a:r>
-          </a:p>
-        </p:txBody>
-      </p:sp>
-      <p:sp>
-        <p:nvSpPr>
-          <p:cNvPr id="2" name="Нижний колонтитул 1">
-            <a:extLst>
-              <a:ext uri="{FF2B5EF4-FFF2-40B4-BE49-F238E27FC236}">
-                <a16:creationId xmlns:a16="http://schemas.microsoft.com/office/drawing/2014/main" id="{91A8AD5F-DCF2-F71C-E7E2-C2FD42878531}"/>
+              <a:t>Визуальные и звуковые эффекты</a:t>
+            </a:r>
+          </a:p>
+        </p:txBody>
+      </p:sp>
+      <p:sp>
+        <p:nvSpPr>
+          <p:cNvPr id="7" name="Нижний колонтитул 6">
+            <a:extLst>
+              <a:ext uri="{FF2B5EF4-FFF2-40B4-BE49-F238E27FC236}">
+                <a16:creationId xmlns:a16="http://schemas.microsoft.com/office/drawing/2014/main" id="{C9F924E8-B6E6-C266-842D-422148E57074}"/>
               </a:ext>
             </a:extLst>
           </p:cNvPr>
@@ -17024,7 +17125,7 @@
         </p:nvSpPr>
         <p:spPr>
           <a:xfrm>
-            <a:off x="4038600" y="127849"/>
+            <a:off x="4038600" y="114393"/>
             <a:ext cx="4114800" cy="856526"/>
           </a:xfrm>
         </p:spPr>
@@ -17047,26 +17148,21 @@
       </p:sp>
       <p:sp>
         <p:nvSpPr>
-          <p:cNvPr id="8" name="Текст 7">
-            <a:extLst>
-              <a:ext uri="{FF2B5EF4-FFF2-40B4-BE49-F238E27FC236}">
-                <a16:creationId xmlns:a16="http://schemas.microsoft.com/office/drawing/2014/main" id="{F07ACA27-076A-FAA7-417C-5BC0A85F36AF}"/>
-              </a:ext>
-            </a:extLst>
-          </p:cNvPr>
-          <p:cNvSpPr>
-            <a:spLocks noGrp="1"/>
-          </p:cNvSpPr>
-          <p:nvPr>
-            <p:ph type="body" sz="quarter" idx="17"/>
-          </p:nvPr>
-        </p:nvSpPr>
-        <p:spPr>
-          <a:xfrm>
-            <a:off x="858956" y="2415263"/>
-            <a:ext cx="2286000" cy="274320"/>
-          </a:xfrm>
-        </p:spPr>
+          <p:cNvPr id="3" name="Текст 2">
+            <a:extLst>
+              <a:ext uri="{FF2B5EF4-FFF2-40B4-BE49-F238E27FC236}">
+                <a16:creationId xmlns:a16="http://schemas.microsoft.com/office/drawing/2014/main" id="{9B0814BF-E9DC-8615-1CF0-1112CBD60A66}"/>
+              </a:ext>
+            </a:extLst>
+          </p:cNvPr>
+          <p:cNvSpPr>
+            <a:spLocks noGrp="1"/>
+          </p:cNvSpPr>
+          <p:nvPr>
+            <p:ph type="body" idx="1"/>
+          </p:nvPr>
+        </p:nvSpPr>
+        <p:spPr/>
         <p:txBody>
           <a:bodyPr rtlCol="0"/>
           <a:lstStyle>
@@ -17077,34 +17173,29 @@
           <a:p>
             <a:pPr rtl="0"/>
             <a:r>
-              <a:rPr lang="ru-RU" sz="2000" dirty="0"/>
-              <a:t>модули</a:t>
-            </a:r>
-          </a:p>
-        </p:txBody>
-      </p:sp>
-      <p:sp>
-        <p:nvSpPr>
-          <p:cNvPr id="9" name="Текст 8">
-            <a:extLst>
-              <a:ext uri="{FF2B5EF4-FFF2-40B4-BE49-F238E27FC236}">
-                <a16:creationId xmlns:a16="http://schemas.microsoft.com/office/drawing/2014/main" id="{D59ACCB8-2E44-8B01-9BCD-7AD37DA20F2E}"/>
-              </a:ext>
-            </a:extLst>
-          </p:cNvPr>
-          <p:cNvSpPr>
-            <a:spLocks noGrp="1"/>
-          </p:cNvSpPr>
-          <p:nvPr>
-            <p:ph type="body" sz="quarter" idx="18"/>
-          </p:nvPr>
-        </p:nvSpPr>
-        <p:spPr>
-          <a:xfrm>
-            <a:off x="858956" y="2754014"/>
-            <a:ext cx="2286000" cy="674986"/>
-          </a:xfrm>
-        </p:spPr>
+              <a:rPr lang="ru-RU" sz="1400" dirty="0"/>
+              <a:t>Динамика</a:t>
+            </a:r>
+          </a:p>
+        </p:txBody>
+      </p:sp>
+      <p:sp>
+        <p:nvSpPr>
+          <p:cNvPr id="23" name="Объект 22">
+            <a:extLst>
+              <a:ext uri="{FF2B5EF4-FFF2-40B4-BE49-F238E27FC236}">
+                <a16:creationId xmlns:a16="http://schemas.microsoft.com/office/drawing/2014/main" id="{2C051FD2-C541-D8EE-D263-DFD01AD1C602}"/>
+              </a:ext>
+            </a:extLst>
+          </p:cNvPr>
+          <p:cNvSpPr>
+            <a:spLocks noGrp="1"/>
+          </p:cNvSpPr>
+          <p:nvPr>
+            <p:ph sz="half" idx="2"/>
+          </p:nvPr>
+        </p:nvSpPr>
+        <p:spPr/>
         <p:txBody>
           <a:bodyPr rtlCol="0"/>
           <a:lstStyle>
@@ -17113,53 +17204,35 @@
             </a:defPPr>
           </a:lstStyle>
           <a:p>
-            <a:pPr rtl="0">
-              <a:lnSpc>
-                <a:spcPct val="150000"/>
-              </a:lnSpc>
-            </a:pPr>
-            <a:r>
-              <a:rPr lang="en-US" sz="1400" i="1" dirty="0" err="1"/>
-              <a:t>PyGame</a:t>
-            </a:r>
-            <a:endParaRPr lang="en-US" sz="1400" i="1" dirty="0"/>
-          </a:p>
-          <a:p>
-            <a:pPr rtl="0">
-              <a:lnSpc>
-                <a:spcPct val="150000"/>
-              </a:lnSpc>
-            </a:pPr>
-            <a:r>
-              <a:rPr lang="en-US" sz="1400" i="1" dirty="0"/>
-              <a:t>SQLite</a:t>
-            </a:r>
-            <a:endParaRPr lang="ru-RU" sz="1400" i="1" dirty="0"/>
-          </a:p>
-        </p:txBody>
-      </p:sp>
-      <p:sp>
-        <p:nvSpPr>
-          <p:cNvPr id="10" name="Текст 9">
-            <a:extLst>
-              <a:ext uri="{FF2B5EF4-FFF2-40B4-BE49-F238E27FC236}">
-                <a16:creationId xmlns:a16="http://schemas.microsoft.com/office/drawing/2014/main" id="{5670C16D-9661-482A-986D-0D6CB98AB869}"/>
-              </a:ext>
-            </a:extLst>
-          </p:cNvPr>
-          <p:cNvSpPr>
-            <a:spLocks noGrp="1"/>
-          </p:cNvSpPr>
-          <p:nvPr>
-            <p:ph type="body" sz="quarter" idx="19"/>
-          </p:nvPr>
-        </p:nvSpPr>
-        <p:spPr>
-          <a:xfrm>
-            <a:off x="3627305" y="2415263"/>
-            <a:ext cx="2286000" cy="274320"/>
-          </a:xfrm>
-        </p:spPr>
+            <a:pPr rtl="0"/>
+            <a:r>
+              <a:rPr lang="ru-RU" sz="1300" dirty="0"/>
+              <a:t>Заголовок переливается цветами радуги.</a:t>
+            </a:r>
+          </a:p>
+          <a:p>
+            <a:pPr rtl="0"/>
+            <a:endParaRPr lang="ru-RU" dirty="0"/>
+          </a:p>
+        </p:txBody>
+      </p:sp>
+      <p:sp>
+        <p:nvSpPr>
+          <p:cNvPr id="5" name="Текст 4">
+            <a:extLst>
+              <a:ext uri="{FF2B5EF4-FFF2-40B4-BE49-F238E27FC236}">
+                <a16:creationId xmlns:a16="http://schemas.microsoft.com/office/drawing/2014/main" id="{4714EE7D-83C7-DE47-C100-0904BB907007}"/>
+              </a:ext>
+            </a:extLst>
+          </p:cNvPr>
+          <p:cNvSpPr>
+            <a:spLocks noGrp="1"/>
+          </p:cNvSpPr>
+          <p:nvPr>
+            <p:ph type="body" sz="quarter" idx="3"/>
+          </p:nvPr>
+        </p:nvSpPr>
+        <p:spPr/>
         <p:txBody>
           <a:bodyPr rtlCol="0"/>
           <a:lstStyle>
@@ -17168,35 +17241,31 @@
             </a:defPPr>
           </a:lstStyle>
           <a:p>
-            <a:r>
-              <a:rPr lang="ru-RU" sz="2000" dirty="0"/>
-              <a:t>классы</a:t>
-            </a:r>
-          </a:p>
-        </p:txBody>
-      </p:sp>
-      <p:sp>
-        <p:nvSpPr>
-          <p:cNvPr id="11" name="Текст 10">
-            <a:extLst>
-              <a:ext uri="{FF2B5EF4-FFF2-40B4-BE49-F238E27FC236}">
-                <a16:creationId xmlns:a16="http://schemas.microsoft.com/office/drawing/2014/main" id="{22115526-AEC6-C024-712E-E6CC8FB60E4D}"/>
-              </a:ext>
-            </a:extLst>
-          </p:cNvPr>
-          <p:cNvSpPr>
-            <a:spLocks noGrp="1"/>
-          </p:cNvSpPr>
-          <p:nvPr>
-            <p:ph type="body" sz="quarter" idx="20"/>
-          </p:nvPr>
-        </p:nvSpPr>
-        <p:spPr>
-          <a:xfrm>
-            <a:off x="3627305" y="2754014"/>
-            <a:ext cx="2286000" cy="1388220"/>
-          </a:xfrm>
-        </p:spPr>
+            <a:pPr rtl="0"/>
+            <a:r>
+              <a:rPr lang="ru-RU" sz="1400" dirty="0"/>
+              <a:t>Анимация</a:t>
+            </a:r>
+          </a:p>
+        </p:txBody>
+      </p:sp>
+      <p:sp>
+        <p:nvSpPr>
+          <p:cNvPr id="24" name="Объект 23">
+            <a:extLst>
+              <a:ext uri="{FF2B5EF4-FFF2-40B4-BE49-F238E27FC236}">
+                <a16:creationId xmlns:a16="http://schemas.microsoft.com/office/drawing/2014/main" id="{61DE34F0-9D00-D163-584E-9738310DB6BC}"/>
+              </a:ext>
+            </a:extLst>
+          </p:cNvPr>
+          <p:cNvSpPr>
+            <a:spLocks noGrp="1"/>
+          </p:cNvSpPr>
+          <p:nvPr>
+            <p:ph sz="quarter" idx="4"/>
+          </p:nvPr>
+        </p:nvSpPr>
+        <p:spPr/>
         <p:txBody>
           <a:bodyPr rtlCol="0"/>
           <a:lstStyle>
@@ -17205,74 +17274,31 @@
             </a:defPPr>
           </a:lstStyle>
           <a:p>
-            <a:pPr>
-              <a:lnSpc>
-                <a:spcPct val="150000"/>
-              </a:lnSpc>
-            </a:pPr>
-            <a:r>
-              <a:rPr lang="en-US" sz="1400" i="1" dirty="0"/>
-              <a:t>Grid</a:t>
-            </a:r>
-          </a:p>
-          <a:p>
-            <a:pPr>
-              <a:lnSpc>
-                <a:spcPct val="150000"/>
-              </a:lnSpc>
-            </a:pPr>
-            <a:r>
-              <a:rPr lang="en-US" sz="1400" i="1" dirty="0"/>
-              <a:t>Shape</a:t>
-            </a:r>
-          </a:p>
-          <a:p>
-            <a:pPr>
-              <a:lnSpc>
-                <a:spcPct val="150000"/>
-              </a:lnSpc>
-            </a:pPr>
-            <a:r>
-              <a:rPr lang="en-US" sz="1400" i="1" dirty="0"/>
-              <a:t>Button</a:t>
-            </a:r>
-          </a:p>
-          <a:p>
-            <a:pPr>
-              <a:lnSpc>
-                <a:spcPct val="150000"/>
-              </a:lnSpc>
-            </a:pPr>
-            <a:r>
-              <a:rPr lang="en-US" sz="1400" i="1" dirty="0"/>
-              <a:t>Adventure</a:t>
-            </a:r>
-            <a:endParaRPr lang="ru-RU" sz="1400" i="1" dirty="0"/>
-          </a:p>
-        </p:txBody>
-      </p:sp>
-      <p:sp>
-        <p:nvSpPr>
-          <p:cNvPr id="12" name="Текст 11">
-            <a:extLst>
-              <a:ext uri="{FF2B5EF4-FFF2-40B4-BE49-F238E27FC236}">
-                <a16:creationId xmlns:a16="http://schemas.microsoft.com/office/drawing/2014/main" id="{E26CB388-D0E5-9548-A57B-8A5352089E15}"/>
-              </a:ext>
-            </a:extLst>
-          </p:cNvPr>
-          <p:cNvSpPr>
-            <a:spLocks noGrp="1"/>
-          </p:cNvSpPr>
-          <p:nvPr>
-            <p:ph type="body" sz="quarter" idx="21"/>
-          </p:nvPr>
-        </p:nvSpPr>
-        <p:spPr>
-          <a:xfrm>
-            <a:off x="6017915" y="2456553"/>
-            <a:ext cx="2969912" cy="233030"/>
-          </a:xfrm>
-        </p:spPr>
+            <a:pPr lvl="0" rtl="0"/>
+            <a:r>
+              <a:rPr lang="ru-RU" sz="1300" dirty="0"/>
+              <a:t>Плавное увеличение кнопок при наведении.</a:t>
+            </a:r>
+          </a:p>
+        </p:txBody>
+      </p:sp>
+      <p:sp>
+        <p:nvSpPr>
+          <p:cNvPr id="9" name="Текст 8">
+            <a:extLst>
+              <a:ext uri="{FF2B5EF4-FFF2-40B4-BE49-F238E27FC236}">
+                <a16:creationId xmlns:a16="http://schemas.microsoft.com/office/drawing/2014/main" id="{310ADB9E-1121-2450-35D1-8486C9BC3613}"/>
+              </a:ext>
+            </a:extLst>
+          </p:cNvPr>
+          <p:cNvSpPr>
+            <a:spLocks noGrp="1"/>
+          </p:cNvSpPr>
+          <p:nvPr>
+            <p:ph type="body" sz="quarter" idx="13"/>
+          </p:nvPr>
+        </p:nvSpPr>
+        <p:spPr/>
         <p:txBody>
           <a:bodyPr rtlCol="0"/>
           <a:lstStyle>
@@ -17281,35 +17307,31 @@
             </a:defPPr>
           </a:lstStyle>
           <a:p>
-            <a:r>
-              <a:rPr lang="ru-RU" sz="2000" dirty="0"/>
-              <a:t>технологии</a:t>
-            </a:r>
-          </a:p>
-        </p:txBody>
-      </p:sp>
-      <p:sp>
-        <p:nvSpPr>
-          <p:cNvPr id="13" name="Текст 12">
-            <a:extLst>
-              <a:ext uri="{FF2B5EF4-FFF2-40B4-BE49-F238E27FC236}">
-                <a16:creationId xmlns:a16="http://schemas.microsoft.com/office/drawing/2014/main" id="{7DA1EEF4-1C46-B9FD-302F-61FC0265F748}"/>
-              </a:ext>
-            </a:extLst>
-          </p:cNvPr>
-          <p:cNvSpPr>
-            <a:spLocks noGrp="1"/>
-          </p:cNvSpPr>
-          <p:nvPr>
-            <p:ph type="body" sz="quarter" idx="22"/>
-          </p:nvPr>
-        </p:nvSpPr>
-        <p:spPr>
-          <a:xfrm>
-            <a:off x="6359871" y="2751728"/>
-            <a:ext cx="2286000" cy="1388220"/>
-          </a:xfrm>
-        </p:spPr>
+            <a:pPr rtl="0"/>
+            <a:r>
+              <a:rPr lang="ru-RU" sz="1400" dirty="0"/>
+              <a:t>Новый год</a:t>
+            </a:r>
+          </a:p>
+        </p:txBody>
+      </p:sp>
+      <p:sp>
+        <p:nvSpPr>
+          <p:cNvPr id="25" name="Объект 24">
+            <a:extLst>
+              <a:ext uri="{FF2B5EF4-FFF2-40B4-BE49-F238E27FC236}">
+                <a16:creationId xmlns:a16="http://schemas.microsoft.com/office/drawing/2014/main" id="{3F1B077F-4F6F-1F99-B5B6-BF27786BBA9F}"/>
+              </a:ext>
+            </a:extLst>
+          </p:cNvPr>
+          <p:cNvSpPr>
+            <a:spLocks noGrp="1"/>
+          </p:cNvSpPr>
+          <p:nvPr>
+            <p:ph sz="quarter" idx="14"/>
+          </p:nvPr>
+        </p:nvSpPr>
+        <p:spPr/>
         <p:txBody>
           <a:bodyPr rtlCol="0"/>
           <a:lstStyle>
@@ -17318,74 +17340,31 @@
             </a:defPPr>
           </a:lstStyle>
           <a:p>
-            <a:pPr rtl="0">
-              <a:lnSpc>
-                <a:spcPct val="150000"/>
-              </a:lnSpc>
-            </a:pPr>
-            <a:r>
-              <a:rPr lang="en-US" sz="1400" i="1" dirty="0"/>
-              <a:t>Python 3</a:t>
-            </a:r>
-          </a:p>
-          <a:p>
-            <a:pPr rtl="0">
-              <a:lnSpc>
-                <a:spcPct val="150000"/>
-              </a:lnSpc>
-            </a:pPr>
-            <a:r>
-              <a:rPr lang="en-US" sz="1400" i="1" dirty="0" err="1"/>
-              <a:t>PyGame</a:t>
-            </a:r>
-            <a:endParaRPr lang="en-US" sz="1400" i="1" dirty="0"/>
-          </a:p>
-          <a:p>
-            <a:pPr rtl="0">
-              <a:lnSpc>
-                <a:spcPct val="150000"/>
-              </a:lnSpc>
-            </a:pPr>
-            <a:r>
-              <a:rPr lang="en-US" sz="1400" i="1" dirty="0"/>
-              <a:t>SQLite Studio</a:t>
-            </a:r>
-          </a:p>
-          <a:p>
-            <a:pPr rtl="0">
-              <a:lnSpc>
-                <a:spcPct val="150000"/>
-              </a:lnSpc>
-            </a:pPr>
-            <a:r>
-              <a:rPr lang="en-US" sz="1400" i="1" dirty="0"/>
-              <a:t>Random</a:t>
-            </a:r>
-          </a:p>
-        </p:txBody>
-      </p:sp>
-      <p:sp>
-        <p:nvSpPr>
-          <p:cNvPr id="14" name="Текст 13">
-            <a:extLst>
-              <a:ext uri="{FF2B5EF4-FFF2-40B4-BE49-F238E27FC236}">
-                <a16:creationId xmlns:a16="http://schemas.microsoft.com/office/drawing/2014/main" id="{519D9E81-2623-349E-904D-8BF6ECE353BA}"/>
-              </a:ext>
-            </a:extLst>
-          </p:cNvPr>
-          <p:cNvSpPr>
-            <a:spLocks noGrp="1"/>
-          </p:cNvSpPr>
-          <p:nvPr>
-            <p:ph type="body" sz="quarter" idx="23"/>
-          </p:nvPr>
-        </p:nvSpPr>
-        <p:spPr>
-          <a:xfrm>
-            <a:off x="9095930" y="2418762"/>
-            <a:ext cx="2286000" cy="274320"/>
-          </a:xfrm>
-        </p:spPr>
+            <a:pPr lvl="0" rtl="0"/>
+            <a:r>
+              <a:rPr lang="ru-RU" sz="1300" dirty="0"/>
+              <a:t>Снежинки украшают фон игрового меню.</a:t>
+            </a:r>
+          </a:p>
+        </p:txBody>
+      </p:sp>
+      <p:sp>
+        <p:nvSpPr>
+          <p:cNvPr id="11" name="Текст 10">
+            <a:extLst>
+              <a:ext uri="{FF2B5EF4-FFF2-40B4-BE49-F238E27FC236}">
+                <a16:creationId xmlns:a16="http://schemas.microsoft.com/office/drawing/2014/main" id="{FAA4C0B8-3B41-049C-EA95-B5BC48C10C66}"/>
+              </a:ext>
+            </a:extLst>
+          </p:cNvPr>
+          <p:cNvSpPr>
+            <a:spLocks noGrp="1"/>
+          </p:cNvSpPr>
+          <p:nvPr>
+            <p:ph type="body" sz="quarter" idx="15"/>
+          </p:nvPr>
+        </p:nvSpPr>
+        <p:spPr/>
         <p:txBody>
           <a:bodyPr rtlCol="0"/>
           <a:lstStyle>
@@ -17394,35 +17373,31 @@
             </a:defPPr>
           </a:lstStyle>
           <a:p>
-            <a:r>
-              <a:rPr lang="ru-RU" sz="2000" dirty="0"/>
-              <a:t>таблицы</a:t>
-            </a:r>
-          </a:p>
-        </p:txBody>
-      </p:sp>
-      <p:sp>
-        <p:nvSpPr>
-          <p:cNvPr id="15" name="Текст 14">
-            <a:extLst>
-              <a:ext uri="{FF2B5EF4-FFF2-40B4-BE49-F238E27FC236}">
-                <a16:creationId xmlns:a16="http://schemas.microsoft.com/office/drawing/2014/main" id="{2FC00352-D201-B54A-FE76-985161F19FEC}"/>
-              </a:ext>
-            </a:extLst>
-          </p:cNvPr>
-          <p:cNvSpPr>
-            <a:spLocks noGrp="1"/>
-          </p:cNvSpPr>
-          <p:nvPr>
-            <p:ph type="body" sz="quarter" idx="24"/>
-          </p:nvPr>
-        </p:nvSpPr>
-        <p:spPr>
-          <a:xfrm>
-            <a:off x="9128220" y="2767534"/>
-            <a:ext cx="2286000" cy="1741586"/>
-          </a:xfrm>
-        </p:spPr>
+            <a:pPr rtl="0"/>
+            <a:r>
+              <a:rPr lang="ru-RU" sz="1400" dirty="0"/>
+              <a:t>Цвета</a:t>
+            </a:r>
+          </a:p>
+        </p:txBody>
+      </p:sp>
+      <p:sp>
+        <p:nvSpPr>
+          <p:cNvPr id="26" name="Объект 25">
+            <a:extLst>
+              <a:ext uri="{FF2B5EF4-FFF2-40B4-BE49-F238E27FC236}">
+                <a16:creationId xmlns:a16="http://schemas.microsoft.com/office/drawing/2014/main" id="{6ACBEE98-EEED-F89F-8CC0-E8497F8E546E}"/>
+              </a:ext>
+            </a:extLst>
+          </p:cNvPr>
+          <p:cNvSpPr>
+            <a:spLocks noGrp="1"/>
+          </p:cNvSpPr>
+          <p:nvPr>
+            <p:ph sz="quarter" idx="16"/>
+          </p:nvPr>
+        </p:nvSpPr>
+        <p:spPr/>
         <p:txBody>
           <a:bodyPr rtlCol="0"/>
           <a:lstStyle>
@@ -17431,68 +17406,86 @@
             </a:defPPr>
           </a:lstStyle>
           <a:p>
-            <a:pPr>
-              <a:lnSpc>
-                <a:spcPct val="150000"/>
-              </a:lnSpc>
-            </a:pPr>
-            <a:r>
-              <a:rPr lang="en-US" sz="1400" i="1" dirty="0"/>
-              <a:t>Adventure grid</a:t>
-            </a:r>
-          </a:p>
-          <a:p>
-            <a:pPr>
-              <a:lnSpc>
-                <a:spcPct val="150000"/>
-              </a:lnSpc>
-            </a:pPr>
-            <a:r>
-              <a:rPr lang="en-US" sz="1400" i="1" dirty="0"/>
-              <a:t>Classic grid</a:t>
-            </a:r>
-          </a:p>
-          <a:p>
-            <a:pPr>
-              <a:lnSpc>
-                <a:spcPct val="150000"/>
-              </a:lnSpc>
-            </a:pPr>
-            <a:r>
-              <a:rPr lang="en-US" sz="1400" i="1" dirty="0"/>
-              <a:t>Levels</a:t>
-            </a:r>
-          </a:p>
-          <a:p>
-            <a:pPr>
-              <a:lnSpc>
-                <a:spcPct val="150000"/>
-              </a:lnSpc>
-            </a:pPr>
-            <a:r>
-              <a:rPr lang="en-US" sz="1400" i="1" dirty="0"/>
-              <a:t>Pieces</a:t>
-            </a:r>
-          </a:p>
-          <a:p>
-            <a:pPr>
-              <a:lnSpc>
-                <a:spcPct val="150000"/>
-              </a:lnSpc>
-            </a:pPr>
-            <a:r>
-              <a:rPr lang="en-US" sz="1400" i="1" dirty="0"/>
-              <a:t>Scores</a:t>
-            </a:r>
-          </a:p>
-        </p:txBody>
-      </p:sp>
-      <p:sp>
-        <p:nvSpPr>
-          <p:cNvPr id="3" name="Номер слайда 2">
-            <a:extLst>
-              <a:ext uri="{FF2B5EF4-FFF2-40B4-BE49-F238E27FC236}">
-                <a16:creationId xmlns:a16="http://schemas.microsoft.com/office/drawing/2014/main" id="{C11CC6B6-E9D4-1736-ABF6-727D2464A975}"/>
+            <a:pPr lvl="0" rtl="0"/>
+            <a:r>
+              <a:rPr lang="ru-RU" sz="1300" dirty="0"/>
+              <a:t>Фигурки при генерации имеют яркие цвета.</a:t>
+            </a:r>
+          </a:p>
+        </p:txBody>
+      </p:sp>
+      <p:sp>
+        <p:nvSpPr>
+          <p:cNvPr id="13" name="Текст 12">
+            <a:extLst>
+              <a:ext uri="{FF2B5EF4-FFF2-40B4-BE49-F238E27FC236}">
+                <a16:creationId xmlns:a16="http://schemas.microsoft.com/office/drawing/2014/main" id="{8850A56B-786B-E4E2-77AC-8193D264E2FE}"/>
+              </a:ext>
+            </a:extLst>
+          </p:cNvPr>
+          <p:cNvSpPr>
+            <a:spLocks noGrp="1"/>
+          </p:cNvSpPr>
+          <p:nvPr>
+            <p:ph type="body" sz="quarter" idx="17"/>
+          </p:nvPr>
+        </p:nvSpPr>
+        <p:spPr/>
+        <p:txBody>
+          <a:bodyPr rtlCol="0"/>
+          <a:lstStyle>
+            <a:defPPr>
+              <a:defRPr lang="ru-MO"/>
+            </a:defPPr>
+          </a:lstStyle>
+          <a:p>
+            <a:pPr rtl="0"/>
+            <a:r>
+              <a:rPr lang="ru-RU" sz="1400" dirty="0"/>
+              <a:t>Музыка</a:t>
+            </a:r>
+          </a:p>
+        </p:txBody>
+      </p:sp>
+      <p:sp>
+        <p:nvSpPr>
+          <p:cNvPr id="27" name="Объект 26">
+            <a:extLst>
+              <a:ext uri="{FF2B5EF4-FFF2-40B4-BE49-F238E27FC236}">
+                <a16:creationId xmlns:a16="http://schemas.microsoft.com/office/drawing/2014/main" id="{5D63848E-7E38-C88A-D15E-40DF95AB07BB}"/>
+              </a:ext>
+            </a:extLst>
+          </p:cNvPr>
+          <p:cNvSpPr>
+            <a:spLocks noGrp="1"/>
+          </p:cNvSpPr>
+          <p:nvPr>
+            <p:ph sz="quarter" idx="18"/>
+          </p:nvPr>
+        </p:nvSpPr>
+        <p:spPr/>
+        <p:txBody>
+          <a:bodyPr rtlCol="0"/>
+          <a:lstStyle>
+            <a:defPPr>
+              <a:defRPr lang="ru-MO"/>
+            </a:defPPr>
+          </a:lstStyle>
+          <a:p>
+            <a:pPr lvl="0" rtl="0"/>
+            <a:r>
+              <a:rPr lang="ru-RU" sz="1300" dirty="0"/>
+              <a:t>Музыкальные эффекты насыщают игру жизнью и динамикой,</a:t>
+            </a:r>
+          </a:p>
+        </p:txBody>
+      </p:sp>
+      <p:sp>
+        <p:nvSpPr>
+          <p:cNvPr id="8" name="Номер слайда 7">
+            <a:extLst>
+              <a:ext uri="{FF2B5EF4-FFF2-40B4-BE49-F238E27FC236}">
+                <a16:creationId xmlns:a16="http://schemas.microsoft.com/office/drawing/2014/main" id="{60DE4CC7-0F16-896F-1EBA-F387E12A24C3}"/>
               </a:ext>
             </a:extLst>
           </p:cNvPr>
@@ -17525,7 +17518,7 @@
     </p:spTree>
     <p:extLst>
       <p:ext uri="{BB962C8B-B14F-4D97-AF65-F5344CB8AC3E}">
-        <p14:creationId xmlns:p14="http://schemas.microsoft.com/office/powerpoint/2010/main" val="4028410468"/>
+        <p14:creationId xmlns:p14="http://schemas.microsoft.com/office/powerpoint/2010/main" val="3008749983"/>
       </p:ext>
     </p:extLst>
   </p:cSld>

--- a/other/Cube cascade.pptx
+++ b/other/Cube cascade.pptx
@@ -13375,7 +13375,7 @@
         <p:spPr>
           <a:xfrm>
             <a:off x="8744688" y="5753671"/>
-            <a:ext cx="3447312" cy="1280160"/>
+            <a:ext cx="3447312" cy="1104329"/>
           </a:xfrm>
           <a:prstGeom prst="rect">
             <a:avLst/>
@@ -13564,6 +13564,21 @@
                 <a:latin typeface="Arial Narrow" panose="020B0606020202030204" pitchFamily="34" charset="0"/>
                 <a:ea typeface="+mj-ea"/>
               </a:rPr>
+              <a:t>Аркадий Гуляков</a:t>
+            </a:r>
+          </a:p>
+          <a:p>
+            <a:r>
+              <a:rPr lang="ru-RU" sz="2000" b="0" cap="all" spc="300" dirty="0">
+                <a:ln w="28575">
+                  <a:solidFill>
+                    <a:schemeClr val="tx1"/>
+                  </a:solidFill>
+                </a:ln>
+                <a:noFill/>
+                <a:latin typeface="Arial Narrow" panose="020B0606020202030204" pitchFamily="34" charset="0"/>
+                <a:ea typeface="+mj-ea"/>
+              </a:rPr>
               <a:t>Бахара</a:t>
             </a:r>
             <a:r>
@@ -13602,21 +13617,6 @@
               <a:latin typeface="Arial Narrow" panose="020B0606020202030204" pitchFamily="34" charset="0"/>
               <a:ea typeface="+mj-ea"/>
             </a:endParaRPr>
-          </a:p>
-          <a:p>
-            <a:r>
-              <a:rPr lang="ru-RU" sz="2000" b="0" cap="all" spc="300" dirty="0">
-                <a:ln w="28575">
-                  <a:solidFill>
-                    <a:schemeClr val="tx1"/>
-                  </a:solidFill>
-                </a:ln>
-                <a:noFill/>
-                <a:latin typeface="Arial Narrow" panose="020B0606020202030204" pitchFamily="34" charset="0"/>
-                <a:ea typeface="+mj-ea"/>
-              </a:rPr>
-              <a:t>Аркадий Гуляков</a:t>
-            </a:r>
           </a:p>
         </p:txBody>
       </p:sp>
@@ -14091,13 +14091,8 @@
             <a:pPr rtl="0"/>
             <a:r>
               <a:rPr lang="ru-RU" sz="1400" dirty="0"/>
-              <a:t>Поддержка на других </a:t>
-            </a:r>
-            <a:r>
-              <a:rPr lang="ru-RU" sz="1400" dirty="0" err="1"/>
-              <a:t>устроуствах</a:t>
-            </a:r>
-            <a:endParaRPr lang="ru-RU" sz="1400" dirty="0"/>
+              <a:t>Поддержка на других устройствах</a:t>
+            </a:r>
           </a:p>
           <a:p>
             <a:pPr rtl="0"/>
@@ -18320,6 +18315,15 @@
 </file>
 
 <file path=customXml/item1.xml><?xml version="1.0" encoding="utf-8"?>
+<?mso-contentType ?>
+<FormTemplates xmlns="http://schemas.microsoft.com/sharepoint/v3/contenttype/forms">
+  <Display>DocumentLibraryForm</Display>
+  <Edit>DocumentLibraryForm</Edit>
+  <New>DocumentLibraryForm</New>
+</FormTemplates>
+</file>
+
+<file path=customXml/item2.xml><?xml version="1.0" encoding="utf-8"?>
 <ct:contentTypeSchema xmlns:ct="http://schemas.microsoft.com/office/2006/metadata/contentType" xmlns:ma="http://schemas.microsoft.com/office/2006/metadata/properties/metaAttributes" ct:_="" ma:_="" ma:contentTypeName="Document" ma:contentTypeID="0x0101003AB9CED55E8F8543BEFD54205924B97E" ma:contentTypeVersion="15" ma:contentTypeDescription="Create a new document." ma:contentTypeScope="" ma:versionID="7934cfc98febfa177962bc8a36be076c">
   <xsd:schema xmlns:xsd="http://www.w3.org/2001/XMLSchema" xmlns:xs="http://www.w3.org/2001/XMLSchema" xmlns:p="http://schemas.microsoft.com/office/2006/metadata/properties" xmlns:ns2="4f0d45a2-344c-4fe0-9811-4277bf2c2e17" xmlns:ns3="bb13cd20-357b-48a5-aff4-3bb4b52aae3e" targetNamespace="http://schemas.microsoft.com/office/2006/metadata/properties" ma:root="true" ma:fieldsID="aa190bc864bcebc737c679dbb323a16d" ns2:_="" ns3:_="">
     <xsd:import namespace="4f0d45a2-344c-4fe0-9811-4277bf2c2e17"/>
@@ -18556,15 +18560,6 @@
 </ct:contentTypeSchema>
 </file>
 
-<file path=customXml/item2.xml><?xml version="1.0" encoding="utf-8"?>
-<?mso-contentType ?>
-<FormTemplates xmlns="http://schemas.microsoft.com/sharepoint/v3/contenttype/forms">
-  <Display>DocumentLibraryForm</Display>
-  <Edit>DocumentLibraryForm</Edit>
-  <New>DocumentLibraryForm</New>
-</FormTemplates>
-</file>
-
 <file path=customXml/item3.xml><?xml version="1.0" encoding="utf-8"?>
 <p:properties xmlns:p="http://schemas.microsoft.com/office/2006/metadata/properties" xmlns:xsi="http://www.w3.org/2001/XMLSchema-instance" xmlns:pc="http://schemas.microsoft.com/office/infopath/2007/PartnerControls">
   <documentManagement>
@@ -18578,6 +18573,14 @@
 </file>
 
 <file path=customXml/itemProps1.xml><?xml version="1.0" encoding="utf-8"?>
+<ds:datastoreItem xmlns:ds="http://schemas.openxmlformats.org/officeDocument/2006/customXml" ds:itemID="{2421B937-7172-47A3-B8EF-010B04CBBB90}">
+  <ds:schemaRefs>
+    <ds:schemaRef ds:uri="http://schemas.microsoft.com/sharepoint/v3/contenttype/forms"/>
+  </ds:schemaRefs>
+</ds:datastoreItem>
+</file>
+
+<file path=customXml/itemProps2.xml><?xml version="1.0" encoding="utf-8"?>
 <ds:datastoreItem xmlns:ds="http://schemas.openxmlformats.org/officeDocument/2006/customXml" ds:itemID="{2F87CEBD-BBDE-418A-B819-466B763DD4B5}">
   <ds:schemaRefs>
     <ds:schemaRef ds:uri="http://schemas.microsoft.com/office/2006/metadata/contentType"/>
@@ -18592,14 +18595,6 @@
     <ds:schemaRef ds:uri="http://purl.org/dc/elements/1.1/"/>
     <ds:schemaRef ds:uri="http://purl.org/dc/terms/"/>
     <ds:schemaRef ds:uri="http://schemas.microsoft.com/internal/obd"/>
-  </ds:schemaRefs>
-</ds:datastoreItem>
-</file>
-
-<file path=customXml/itemProps2.xml><?xml version="1.0" encoding="utf-8"?>
-<ds:datastoreItem xmlns:ds="http://schemas.openxmlformats.org/officeDocument/2006/customXml" ds:itemID="{2421B937-7172-47A3-B8EF-010B04CBBB90}">
-  <ds:schemaRefs>
-    <ds:schemaRef ds:uri="http://schemas.microsoft.com/sharepoint/v3/contenttype/forms"/>
   </ds:schemaRefs>
 </ds:datastoreItem>
 </file>
